--- a/LabBook_30.pptx
+++ b/LabBook_30.pptx
@@ -16,8 +16,8 @@
     <p:sldId id="290" r:id="rId4"/>
     <p:sldId id="296" r:id="rId5"/>
     <p:sldId id="375" r:id="rId6"/>
-    <p:sldId id="376" r:id="rId7"/>
-    <p:sldId id="397" r:id="rId8"/>
+    <p:sldId id="398" r:id="rId7"/>
+    <p:sldId id="399" r:id="rId8"/>
     <p:sldId id="377" r:id="rId9"/>
     <p:sldId id="388" r:id="rId10"/>
     <p:sldId id="391" r:id="rId11"/>
@@ -143,7 +143,7 @@
 <file path=ppt/revisionInfo.xml><?xml version="1.0" encoding="utf-8"?>
 <p1510:revInfo xmlns:a="http://schemas.openxmlformats.org/drawingml/2006/main" xmlns:r="http://schemas.openxmlformats.org/officeDocument/2006/relationships" xmlns:p1510="http://schemas.microsoft.com/office/powerpoint/2015/10/main">
   <p1510:revLst>
-    <p1510:client id="{50FAEE5F-E2EF-408D-AA0D-6D9C1BC62557}" v="241" dt="2026-05-23T17:46:50.906"/>
+    <p1510:client id="{50FAEE5F-E2EF-408D-AA0D-6D9C1BC62557}" v="244" dt="2026-05-27T11:18:28.191"/>
   </p1510:revLst>
 </p1510:revInfo>
 </file>
@@ -226,37 +226,6 @@
           </ac:spMkLst>
         </pc:spChg>
       </pc:sldChg>
-      <pc:sldChg chg="modSp">
-        <pc:chgData name="David Bujeda Maicas" userId="S::dbujmai@upv.edu.es::1218fd7a-844c-42f9-a342-8460c647aec0" providerId="AD" clId="Web-{48FA484F-D604-0A5E-B569-3A31BA387429}" dt="2026-05-05T11:09:47.270" v="130" actId="1076"/>
-        <pc:sldMkLst>
-          <pc:docMk/>
-          <pc:sldMk cId="1475710608" sldId="376"/>
-        </pc:sldMkLst>
-        <pc:spChg chg="mod">
-          <ac:chgData name="David Bujeda Maicas" userId="S::dbujmai@upv.edu.es::1218fd7a-844c-42f9-a342-8460c647aec0" providerId="AD" clId="Web-{48FA484F-D604-0A5E-B569-3A31BA387429}" dt="2026-05-05T11:08:52.653" v="118" actId="20577"/>
-          <ac:spMkLst>
-            <pc:docMk/>
-            <pc:sldMk cId="1475710608" sldId="376"/>
-            <ac:spMk id="2" creationId="{F1C12A10-91CE-B5DA-9D77-267ED06AEAC2}"/>
-          </ac:spMkLst>
-        </pc:spChg>
-        <pc:spChg chg="mod">
-          <ac:chgData name="David Bujeda Maicas" userId="S::dbujmai@upv.edu.es::1218fd7a-844c-42f9-a342-8460c647aec0" providerId="AD" clId="Web-{48FA484F-D604-0A5E-B569-3A31BA387429}" dt="2026-05-05T11:09:38.894" v="128" actId="1076"/>
-          <ac:spMkLst>
-            <pc:docMk/>
-            <pc:sldMk cId="1475710608" sldId="376"/>
-            <ac:spMk id="4" creationId="{FDBAE930-4EE5-671B-4DE7-6BC60C48E7C0}"/>
-          </ac:spMkLst>
-        </pc:spChg>
-        <pc:spChg chg="mod">
-          <ac:chgData name="David Bujeda Maicas" userId="S::dbujmai@upv.edu.es::1218fd7a-844c-42f9-a342-8460c647aec0" providerId="AD" clId="Web-{48FA484F-D604-0A5E-B569-3A31BA387429}" dt="2026-05-05T11:09:20.046" v="122" actId="1076"/>
-          <ac:spMkLst>
-            <pc:docMk/>
-            <pc:sldMk cId="1475710608" sldId="376"/>
-            <ac:spMk id="7" creationId="{A6CCE634-FF91-FD5F-7C1D-4329E9DA2469}"/>
-          </ac:spMkLst>
-        </pc:spChg>
-      </pc:sldChg>
       <pc:sldChg chg="addSp delSp modSp">
         <pc:chgData name="David Bujeda Maicas" userId="S::dbujmai@upv.edu.es::1218fd7a-844c-42f9-a342-8460c647aec0" providerId="AD" clId="Web-{48FA484F-D604-0A5E-B569-3A31BA387429}" dt="2026-05-05T11:26:18.345" v="189" actId="14100"/>
         <pc:sldMkLst>
@@ -331,7 +300,7 @@
   <pc:docChgLst>
     <pc:chgData name="Alexia Ruiz Rocamora" userId="103ef104-b4e4-48c1-b8e3-6388a924cd7a" providerId="ADAL" clId="{4576E0F9-38BE-4DD8-8AC3-520E4AD486A4}"/>
     <pc:docChg chg="custSel addSld delSld modSld sldOrd">
-      <pc:chgData name="Alexia Ruiz Rocamora" userId="103ef104-b4e4-48c1-b8e3-6388a924cd7a" providerId="ADAL" clId="{4576E0F9-38BE-4DD8-8AC3-520E4AD486A4}" dt="2026-05-25T16:51:27.686" v="5602" actId="20577"/>
+      <pc:chgData name="Alexia Ruiz Rocamora" userId="103ef104-b4e4-48c1-b8e3-6388a924cd7a" providerId="ADAL" clId="{4576E0F9-38BE-4DD8-8AC3-520E4AD486A4}" dt="2026-05-27T11:39:14.769" v="7034" actId="20577"/>
       <pc:docMkLst>
         <pc:docMk/>
       </pc:docMkLst>
@@ -435,36 +404,20 @@
           </ac:picMkLst>
         </pc:picChg>
       </pc:sldChg>
-      <pc:sldChg chg="addSp delSp modSp mod">
-        <pc:chgData name="Alexia Ruiz Rocamora" userId="103ef104-b4e4-48c1-b8e3-6388a924cd7a" providerId="ADAL" clId="{4576E0F9-38BE-4DD8-8AC3-520E4AD486A4}" dt="2026-05-25T16:35:02.435" v="5361" actId="20577"/>
+      <pc:sldChg chg="addSp delSp modSp del mod">
+        <pc:chgData name="Alexia Ruiz Rocamora" userId="103ef104-b4e4-48c1-b8e3-6388a924cd7a" providerId="ADAL" clId="{4576E0F9-38BE-4DD8-8AC3-520E4AD486A4}" dt="2026-05-26T19:18:14.276" v="5640" actId="47"/>
         <pc:sldMkLst>
           <pc:docMk/>
           <pc:sldMk cId="1475710608" sldId="376"/>
         </pc:sldMkLst>
         <pc:spChg chg="mod">
-          <ac:chgData name="Alexia Ruiz Rocamora" userId="103ef104-b4e4-48c1-b8e3-6388a924cd7a" providerId="ADAL" clId="{4576E0F9-38BE-4DD8-8AC3-520E4AD486A4}" dt="2026-05-25T16:35:02.435" v="5361" actId="20577"/>
+          <ac:chgData name="Alexia Ruiz Rocamora" userId="103ef104-b4e4-48c1-b8e3-6388a924cd7a" providerId="ADAL" clId="{4576E0F9-38BE-4DD8-8AC3-520E4AD486A4}" dt="2026-05-26T10:36:08.681" v="5611" actId="20577"/>
           <ac:spMkLst>
             <pc:docMk/>
             <pc:sldMk cId="1475710608" sldId="376"/>
-            <ac:spMk id="2" creationId="{F1C12A10-91CE-B5DA-9D77-267ED06AEAC2}"/>
+            <ac:spMk id="13" creationId="{1E286371-F443-FD5C-BF57-FB23A8D7F4F7}"/>
           </ac:spMkLst>
         </pc:spChg>
-        <pc:spChg chg="mod">
-          <ac:chgData name="Alexia Ruiz Rocamora" userId="103ef104-b4e4-48c1-b8e3-6388a924cd7a" providerId="ADAL" clId="{4576E0F9-38BE-4DD8-8AC3-520E4AD486A4}" dt="2026-05-23T19:05:30.201" v="1674" actId="20577"/>
-          <ac:spMkLst>
-            <pc:docMk/>
-            <pc:sldMk cId="1475710608" sldId="376"/>
-            <ac:spMk id="7" creationId="{A6CCE634-FF91-FD5F-7C1D-4329E9DA2469}"/>
-          </ac:spMkLst>
-        </pc:spChg>
-        <pc:picChg chg="add mod">
-          <ac:chgData name="Alexia Ruiz Rocamora" userId="103ef104-b4e4-48c1-b8e3-6388a924cd7a" providerId="ADAL" clId="{4576E0F9-38BE-4DD8-8AC3-520E4AD486A4}" dt="2026-05-12T11:15:52.300" v="185" actId="1076"/>
-          <ac:picMkLst>
-            <pc:docMk/>
-            <pc:sldMk cId="1475710608" sldId="376"/>
-            <ac:picMk id="16" creationId="{C4DFF30D-C077-10EF-14C3-025F8282E14B}"/>
-          </ac:picMkLst>
-        </pc:picChg>
       </pc:sldChg>
       <pc:sldChg chg="addSp modSp mod">
         <pc:chgData name="Alexia Ruiz Rocamora" userId="103ef104-b4e4-48c1-b8e3-6388a924cd7a" providerId="ADAL" clId="{4576E0F9-38BE-4DD8-8AC3-520E4AD486A4}" dt="2026-05-25T16:51:27.686" v="5602" actId="20577"/>
@@ -497,13 +450,6 @@
           </ac:picMkLst>
         </pc:picChg>
       </pc:sldChg>
-      <pc:sldChg chg="addSp delSp modSp del mod">
-        <pc:chgData name="Alexia Ruiz Rocamora" userId="103ef104-b4e4-48c1-b8e3-6388a924cd7a" providerId="ADAL" clId="{4576E0F9-38BE-4DD8-8AC3-520E4AD486A4}" dt="2026-05-24T08:33:37.675" v="4873" actId="47"/>
-        <pc:sldMkLst>
-          <pc:docMk/>
-          <pc:sldMk cId="1931625216" sldId="380"/>
-        </pc:sldMkLst>
-      </pc:sldChg>
       <pc:sldChg chg="addSp delSp modSp mod">
         <pc:chgData name="Alexia Ruiz Rocamora" userId="103ef104-b4e4-48c1-b8e3-6388a924cd7a" providerId="ADAL" clId="{4576E0F9-38BE-4DD8-8AC3-520E4AD486A4}" dt="2026-05-24T19:39:13.109" v="5351" actId="20577"/>
         <pc:sldMkLst>
@@ -518,46 +464,6 @@
             <ac:spMk id="8" creationId="{D9601617-351E-AE1A-1F4D-693F2EA59361}"/>
           </ac:spMkLst>
         </pc:spChg>
-        <pc:spChg chg="del">
-          <ac:chgData name="Alexia Ruiz Rocamora" userId="103ef104-b4e4-48c1-b8e3-6388a924cd7a" providerId="ADAL" clId="{4576E0F9-38BE-4DD8-8AC3-520E4AD486A4}" dt="2026-05-24T08:34:00.129" v="4879" actId="478"/>
-          <ac:spMkLst>
-            <pc:docMk/>
-            <pc:sldMk cId="1461196698" sldId="381"/>
-            <ac:spMk id="11" creationId="{B811A5F9-C0B5-716C-70FB-9472E1BC2CD3}"/>
-          </ac:spMkLst>
-        </pc:spChg>
-        <pc:spChg chg="del">
-          <ac:chgData name="Alexia Ruiz Rocamora" userId="103ef104-b4e4-48c1-b8e3-6388a924cd7a" providerId="ADAL" clId="{4576E0F9-38BE-4DD8-8AC3-520E4AD486A4}" dt="2026-05-24T08:33:59.008" v="4878" actId="478"/>
-          <ac:spMkLst>
-            <pc:docMk/>
-            <pc:sldMk cId="1461196698" sldId="381"/>
-            <ac:spMk id="12" creationId="{D9D5941A-D9F5-22E7-7E85-0D04C2B214EC}"/>
-          </ac:spMkLst>
-        </pc:spChg>
-        <pc:spChg chg="del">
-          <ac:chgData name="Alexia Ruiz Rocamora" userId="103ef104-b4e4-48c1-b8e3-6388a924cd7a" providerId="ADAL" clId="{4576E0F9-38BE-4DD8-8AC3-520E4AD486A4}" dt="2026-05-24T08:34:01.671" v="4880" actId="478"/>
-          <ac:spMkLst>
-            <pc:docMk/>
-            <pc:sldMk cId="1461196698" sldId="381"/>
-            <ac:spMk id="15" creationId="{54CF28B4-1346-F41D-2CD8-EA104ABBFB98}"/>
-          </ac:spMkLst>
-        </pc:spChg>
-        <pc:spChg chg="del">
-          <ac:chgData name="Alexia Ruiz Rocamora" userId="103ef104-b4e4-48c1-b8e3-6388a924cd7a" providerId="ADAL" clId="{4576E0F9-38BE-4DD8-8AC3-520E4AD486A4}" dt="2026-05-24T08:34:04.999" v="4881" actId="478"/>
-          <ac:spMkLst>
-            <pc:docMk/>
-            <pc:sldMk cId="1461196698" sldId="381"/>
-            <ac:spMk id="16" creationId="{4A6C8490-F65B-32C9-44E8-9A1A1A1B1769}"/>
-          </ac:spMkLst>
-        </pc:spChg>
-        <pc:picChg chg="add del mod">
-          <ac:chgData name="Alexia Ruiz Rocamora" userId="103ef104-b4e4-48c1-b8e3-6388a924cd7a" providerId="ADAL" clId="{4576E0F9-38BE-4DD8-8AC3-520E4AD486A4}" dt="2026-05-24T08:33:27.759" v="4870" actId="478"/>
-          <ac:picMkLst>
-            <pc:docMk/>
-            <pc:sldMk cId="1461196698" sldId="381"/>
-            <ac:picMk id="3" creationId="{42509EBA-FEFD-06CE-41D6-7185AF57CAE8}"/>
-          </ac:picMkLst>
-        </pc:picChg>
         <pc:picChg chg="add mod">
           <ac:chgData name="Alexia Ruiz Rocamora" userId="103ef104-b4e4-48c1-b8e3-6388a924cd7a" providerId="ADAL" clId="{4576E0F9-38BE-4DD8-8AC3-520E4AD486A4}" dt="2026-05-24T08:34:07.678" v="4882" actId="1076"/>
           <ac:picMkLst>
@@ -581,14 +487,6 @@
             <ac:spMk id="8" creationId="{3BC6D2B9-07F5-E2FA-C9AD-029B63B098DA}"/>
           </ac:spMkLst>
         </pc:spChg>
-        <pc:picChg chg="add del mod">
-          <ac:chgData name="Alexia Ruiz Rocamora" userId="103ef104-b4e4-48c1-b8e3-6388a924cd7a" providerId="ADAL" clId="{4576E0F9-38BE-4DD8-8AC3-520E4AD486A4}" dt="2026-05-24T08:13:55.661" v="4361" actId="478"/>
-          <ac:picMkLst>
-            <pc:docMk/>
-            <pc:sldMk cId="2915989261" sldId="388"/>
-            <ac:picMk id="4" creationId="{6E4819EB-01E8-CD0A-5FC6-5A9671B4D421}"/>
-          </ac:picMkLst>
-        </pc:picChg>
         <pc:picChg chg="add mod">
           <ac:chgData name="Alexia Ruiz Rocamora" userId="103ef104-b4e4-48c1-b8e3-6388a924cd7a" providerId="ADAL" clId="{4576E0F9-38BE-4DD8-8AC3-520E4AD486A4}" dt="2026-05-24T08:13:21.306" v="4349" actId="1076"/>
           <ac:picMkLst>
@@ -597,13 +495,6 @@
             <ac:picMk id="7" creationId="{B5BD54BD-1655-DB6F-1F60-AC0414EE3E77}"/>
           </ac:picMkLst>
         </pc:picChg>
-      </pc:sldChg>
-      <pc:sldChg chg="modSp del mod ord">
-        <pc:chgData name="Alexia Ruiz Rocamora" userId="103ef104-b4e4-48c1-b8e3-6388a924cd7a" providerId="ADAL" clId="{4576E0F9-38BE-4DD8-8AC3-520E4AD486A4}" dt="2026-05-24T07:46:19.121" v="3718" actId="47"/>
-        <pc:sldMkLst>
-          <pc:docMk/>
-          <pc:sldMk cId="2789920953" sldId="390"/>
-        </pc:sldMkLst>
       </pc:sldChg>
       <pc:sldChg chg="addSp delSp modSp mod">
         <pc:chgData name="Alexia Ruiz Rocamora" userId="103ef104-b4e4-48c1-b8e3-6388a924cd7a" providerId="ADAL" clId="{4576E0F9-38BE-4DD8-8AC3-520E4AD486A4}" dt="2026-05-24T08:32:36.088" v="4869" actId="5793"/>
@@ -619,36 +510,12 @@
             <ac:spMk id="8" creationId="{C9AC04B6-1A34-BABB-8C25-C715404165A2}"/>
           </ac:spMkLst>
         </pc:spChg>
-        <pc:picChg chg="add del mod">
-          <ac:chgData name="Alexia Ruiz Rocamora" userId="103ef104-b4e4-48c1-b8e3-6388a924cd7a" providerId="ADAL" clId="{4576E0F9-38BE-4DD8-8AC3-520E4AD486A4}" dt="2026-05-24T08:18:55.090" v="4370" actId="478"/>
-          <ac:picMkLst>
-            <pc:docMk/>
-            <pc:sldMk cId="3455416610" sldId="391"/>
-            <ac:picMk id="4" creationId="{91A6040F-E43D-259B-252D-D5806AFEB1A7}"/>
-          </ac:picMkLst>
-        </pc:picChg>
-        <pc:picChg chg="add del mod">
-          <ac:chgData name="Alexia Ruiz Rocamora" userId="103ef104-b4e4-48c1-b8e3-6388a924cd7a" providerId="ADAL" clId="{4576E0F9-38BE-4DD8-8AC3-520E4AD486A4}" dt="2026-05-24T08:16:36.474" v="4362" actId="478"/>
-          <ac:picMkLst>
-            <pc:docMk/>
-            <pc:sldMk cId="3455416610" sldId="391"/>
-            <ac:picMk id="17" creationId="{44B182F2-F6FC-6753-18C6-6FFEF60101A3}"/>
-          </ac:picMkLst>
-        </pc:picChg>
         <pc:picChg chg="add mod">
           <ac:chgData name="Alexia Ruiz Rocamora" userId="103ef104-b4e4-48c1-b8e3-6388a924cd7a" providerId="ADAL" clId="{4576E0F9-38BE-4DD8-8AC3-520E4AD486A4}" dt="2026-05-24T08:19:04.885" v="4373" actId="1076"/>
           <ac:picMkLst>
             <pc:docMk/>
             <pc:sldMk cId="3455416610" sldId="391"/>
             <ac:picMk id="18" creationId="{7EB7E535-97F4-7B8E-B278-760728CEC3EE}"/>
-          </ac:picMkLst>
-        </pc:picChg>
-        <pc:picChg chg="add del mod">
-          <ac:chgData name="Alexia Ruiz Rocamora" userId="103ef104-b4e4-48c1-b8e3-6388a924cd7a" providerId="ADAL" clId="{4576E0F9-38BE-4DD8-8AC3-520E4AD486A4}" dt="2026-05-24T08:19:58.693" v="4374" actId="478"/>
-          <ac:picMkLst>
-            <pc:docMk/>
-            <pc:sldMk cId="3455416610" sldId="391"/>
-            <ac:picMk id="19" creationId="{022C9B02-47F9-A19D-C459-639C855D42B6}"/>
           </ac:picMkLst>
         </pc:picChg>
         <pc:picChg chg="add mod">
@@ -660,26 +527,96 @@
           </ac:picMkLst>
         </pc:picChg>
       </pc:sldChg>
-      <pc:sldChg chg="addSp delSp modSp add mod">
-        <pc:chgData name="Alexia Ruiz Rocamora" userId="103ef104-b4e4-48c1-b8e3-6388a924cd7a" providerId="ADAL" clId="{4576E0F9-38BE-4DD8-8AC3-520E4AD486A4}" dt="2026-05-23T20:02:49.861" v="3095" actId="478"/>
+      <pc:sldChg chg="addSp delSp modSp add del mod">
+        <pc:chgData name="Alexia Ruiz Rocamora" userId="103ef104-b4e4-48c1-b8e3-6388a924cd7a" providerId="ADAL" clId="{4576E0F9-38BE-4DD8-8AC3-520E4AD486A4}" dt="2026-05-26T19:18:02.858" v="5639" actId="47"/>
         <pc:sldMkLst>
           <pc:docMk/>
           <pc:sldMk cId="1635538090" sldId="397"/>
         </pc:sldMkLst>
         <pc:spChg chg="mod">
-          <ac:chgData name="Alexia Ruiz Rocamora" userId="103ef104-b4e4-48c1-b8e3-6388a924cd7a" providerId="ADAL" clId="{4576E0F9-38BE-4DD8-8AC3-520E4AD486A4}" dt="2026-05-23T19:05:41.163" v="1721" actId="20577"/>
+          <ac:chgData name="Alexia Ruiz Rocamora" userId="103ef104-b4e4-48c1-b8e3-6388a924cd7a" providerId="ADAL" clId="{4576E0F9-38BE-4DD8-8AC3-520E4AD486A4}" dt="2026-05-26T10:36:17.849" v="5617" actId="20577"/>
           <ac:spMkLst>
             <pc:docMk/>
             <pc:sldMk cId="1635538090" sldId="397"/>
-            <ac:spMk id="7" creationId="{6DF9E299-A96A-1AF0-9C8D-334C17486454}"/>
+            <ac:spMk id="13" creationId="{0DDC95A3-1D4E-4161-9C21-7A30A1DB8177}"/>
+          </ac:spMkLst>
+        </pc:spChg>
+      </pc:sldChg>
+      <pc:sldChg chg="addSp delSp modSp add mod ord">
+        <pc:chgData name="Alexia Ruiz Rocamora" userId="103ef104-b4e4-48c1-b8e3-6388a924cd7a" providerId="ADAL" clId="{4576E0F9-38BE-4DD8-8AC3-520E4AD486A4}" dt="2026-05-27T11:21:23.406" v="6059" actId="20577"/>
+        <pc:sldMkLst>
+          <pc:docMk/>
+          <pc:sldMk cId="3435094062" sldId="398"/>
+        </pc:sldMkLst>
+        <pc:spChg chg="mod">
+          <ac:chgData name="Alexia Ruiz Rocamora" userId="103ef104-b4e4-48c1-b8e3-6388a924cd7a" providerId="ADAL" clId="{4576E0F9-38BE-4DD8-8AC3-520E4AD486A4}" dt="2026-05-27T11:21:23.406" v="6059" actId="20577"/>
+          <ac:spMkLst>
+            <pc:docMk/>
+            <pc:sldMk cId="3435094062" sldId="398"/>
+            <ac:spMk id="2" creationId="{80549B71-9D6F-09A4-A56E-F47E64164AB0}"/>
           </ac:spMkLst>
         </pc:spChg>
         <pc:picChg chg="add mod">
-          <ac:chgData name="Alexia Ruiz Rocamora" userId="103ef104-b4e4-48c1-b8e3-6388a924cd7a" providerId="ADAL" clId="{4576E0F9-38BE-4DD8-8AC3-520E4AD486A4}" dt="2026-05-12T11:27:38.421" v="190" actId="1076"/>
+          <ac:chgData name="Alexia Ruiz Rocamora" userId="103ef104-b4e4-48c1-b8e3-6388a924cd7a" providerId="ADAL" clId="{4576E0F9-38BE-4DD8-8AC3-520E4AD486A4}" dt="2026-05-26T18:50:51.847" v="5623" actId="1076"/>
           <ac:picMkLst>
             <pc:docMk/>
-            <pc:sldMk cId="1635538090" sldId="397"/>
-            <ac:picMk id="8" creationId="{968DD534-63B3-4107-3E0E-37CE614589B8}"/>
+            <pc:sldMk cId="3435094062" sldId="398"/>
+            <ac:picMk id="8" creationId="{A0AC8167-89D8-C79C-4A1B-2364C4C124DE}"/>
+          </ac:picMkLst>
+        </pc:picChg>
+        <pc:picChg chg="del">
+          <ac:chgData name="Alexia Ruiz Rocamora" userId="103ef104-b4e4-48c1-b8e3-6388a924cd7a" providerId="ADAL" clId="{4576E0F9-38BE-4DD8-8AC3-520E4AD486A4}" dt="2026-05-26T18:50:41.918" v="5618" actId="478"/>
+          <ac:picMkLst>
+            <pc:docMk/>
+            <pc:sldMk cId="3435094062" sldId="398"/>
+            <ac:picMk id="16" creationId="{7A0253EA-34C4-F579-7FF6-04D4F85BCAF5}"/>
+          </ac:picMkLst>
+        </pc:picChg>
+      </pc:sldChg>
+      <pc:sldChg chg="addSp delSp modSp add mod">
+        <pc:chgData name="Alexia Ruiz Rocamora" userId="103ef104-b4e4-48c1-b8e3-6388a924cd7a" providerId="ADAL" clId="{4576E0F9-38BE-4DD8-8AC3-520E4AD486A4}" dt="2026-05-27T11:39:14.769" v="7034" actId="20577"/>
+        <pc:sldMkLst>
+          <pc:docMk/>
+          <pc:sldMk cId="2258742307" sldId="399"/>
+        </pc:sldMkLst>
+        <pc:spChg chg="mod">
+          <ac:chgData name="Alexia Ruiz Rocamora" userId="103ef104-b4e4-48c1-b8e3-6388a924cd7a" providerId="ADAL" clId="{4576E0F9-38BE-4DD8-8AC3-520E4AD486A4}" dt="2026-05-27T11:39:14.769" v="7034" actId="20577"/>
+          <ac:spMkLst>
+            <pc:docMk/>
+            <pc:sldMk cId="2258742307" sldId="399"/>
+            <ac:spMk id="2" creationId="{305169C8-1970-93CE-E3F4-060DE50AFFB7}"/>
+          </ac:spMkLst>
+        </pc:spChg>
+        <pc:spChg chg="mod">
+          <ac:chgData name="Alexia Ruiz Rocamora" userId="103ef104-b4e4-48c1-b8e3-6388a924cd7a" providerId="ADAL" clId="{4576E0F9-38BE-4DD8-8AC3-520E4AD486A4}" dt="2026-05-26T18:52:09.278" v="5632"/>
+          <ac:spMkLst>
+            <pc:docMk/>
+            <pc:sldMk cId="2258742307" sldId="399"/>
+            <ac:spMk id="7" creationId="{5C79C3D3-A414-D20A-CFF3-6D53EFB8D7B8}"/>
+          </ac:spMkLst>
+        </pc:spChg>
+        <pc:picChg chg="del">
+          <ac:chgData name="Alexia Ruiz Rocamora" userId="103ef104-b4e4-48c1-b8e3-6388a924cd7a" providerId="ADAL" clId="{4576E0F9-38BE-4DD8-8AC3-520E4AD486A4}" dt="2026-05-26T18:51:13.254" v="5625" actId="478"/>
+          <ac:picMkLst>
+            <pc:docMk/>
+            <pc:sldMk cId="2258742307" sldId="399"/>
+            <ac:picMk id="8" creationId="{E53F250D-A99C-3A48-2F86-47EAE3C71B87}"/>
+          </ac:picMkLst>
+        </pc:picChg>
+        <pc:picChg chg="add del mod">
+          <ac:chgData name="Alexia Ruiz Rocamora" userId="103ef104-b4e4-48c1-b8e3-6388a924cd7a" providerId="ADAL" clId="{4576E0F9-38BE-4DD8-8AC3-520E4AD486A4}" dt="2026-05-26T19:07:47.817" v="5633" actId="478"/>
+          <ac:picMkLst>
+            <pc:docMk/>
+            <pc:sldMk cId="2258742307" sldId="399"/>
+            <ac:picMk id="11" creationId="{2750B09A-2542-49C2-F248-D49C6D19755D}"/>
+          </ac:picMkLst>
+        </pc:picChg>
+        <pc:picChg chg="add mod">
+          <ac:chgData name="Alexia Ruiz Rocamora" userId="103ef104-b4e4-48c1-b8e3-6388a924cd7a" providerId="ADAL" clId="{4576E0F9-38BE-4DD8-8AC3-520E4AD486A4}" dt="2026-05-26T19:07:55.783" v="5638" actId="14100"/>
+          <ac:picMkLst>
+            <pc:docMk/>
+            <pc:sldMk cId="2258742307" sldId="399"/>
+            <ac:picMk id="14" creationId="{751D3DA2-B3D0-7771-39BF-E296A2E6061C}"/>
           </ac:picMkLst>
         </pc:picChg>
       </pc:sldChg>
@@ -782,7 +719,7 @@
           <a:p>
             <a:fld id="{8438F8DC-35B0-48E6-A86E-42F1F08DD00F}" type="datetimeFigureOut">
               <a:rPr lang="es-ES" smtClean="0"/>
-              <a:t>25/05/2026</a:t>
+              <a:t>27/05/2026</a:t>
             </a:fld>
             <a:endParaRPr lang="es-ES"/>
           </a:p>
@@ -959,7 +896,7 @@
           <a:p>
             <a:fld id="{FACBDC12-F39B-4B97-8F4D-6734F9D366FF}" type="datetimeFigureOut">
               <a:rPr lang="es-ES" smtClean="0"/>
-              <a:t>25/05/2026</a:t>
+              <a:t>27/05/2026</a:t>
             </a:fld>
             <a:endParaRPr lang="es-ES"/>
           </a:p>
@@ -9933,7 +9870,7 @@
         <p:cNvPr id="1" name="">
           <a:extLst>
             <a:ext uri="{FF2B5EF4-FFF2-40B4-BE49-F238E27FC236}">
-              <a16:creationId xmlns:a16="http://schemas.microsoft.com/office/drawing/2014/main" id="{7A01636B-7BF0-5143-57E9-673FF1B33E8E}"/>
+              <a16:creationId xmlns:a16="http://schemas.microsoft.com/office/drawing/2014/main" id="{AB99F4CA-B3F7-EB90-C3BA-460C18DFF68A}"/>
             </a:ext>
           </a:extLst>
         </p:cNvPr>
@@ -9953,7 +9890,7 @@
           <p:cNvPr id="5" name="Marcador de pie de página 4">
             <a:extLst>
               <a:ext uri="{FF2B5EF4-FFF2-40B4-BE49-F238E27FC236}">
-                <a16:creationId xmlns:a16="http://schemas.microsoft.com/office/drawing/2014/main" id="{D79F9CCB-631D-A124-3694-9DBF91E01CAA}"/>
+                <a16:creationId xmlns:a16="http://schemas.microsoft.com/office/drawing/2014/main" id="{2C32E102-EC3C-CE78-2415-BA735E8F3D5D}"/>
               </a:ext>
             </a:extLst>
           </p:cNvPr>
@@ -9981,7 +9918,7 @@
           <p:cNvPr id="6" name="Marcador de número de diapositiva 5">
             <a:extLst>
               <a:ext uri="{FF2B5EF4-FFF2-40B4-BE49-F238E27FC236}">
-                <a16:creationId xmlns:a16="http://schemas.microsoft.com/office/drawing/2014/main" id="{DED76083-7F21-5E97-9AC1-DEEB9C8B23CA}"/>
+                <a16:creationId xmlns:a16="http://schemas.microsoft.com/office/drawing/2014/main" id="{6A97BC0E-0E90-DFFA-A945-EEFA755D478F}"/>
               </a:ext>
             </a:extLst>
           </p:cNvPr>
@@ -10011,7 +9948,7 @@
           <p:cNvPr id="10" name="Gráfico 9">
             <a:extLst>
               <a:ext uri="{FF2B5EF4-FFF2-40B4-BE49-F238E27FC236}">
-                <a16:creationId xmlns:a16="http://schemas.microsoft.com/office/drawing/2014/main" id="{6A4FE9E0-92EE-4367-CEE1-FB072709D7E8}"/>
+                <a16:creationId xmlns:a16="http://schemas.microsoft.com/office/drawing/2014/main" id="{D8D393EE-E7E7-F426-EB02-921E3B4C6FF2}"/>
               </a:ext>
             </a:extLst>
           </p:cNvPr>
@@ -10047,7 +9984,7 @@
           <p:cNvPr id="13" name="object 16">
             <a:extLst>
               <a:ext uri="{FF2B5EF4-FFF2-40B4-BE49-F238E27FC236}">
-                <a16:creationId xmlns:a16="http://schemas.microsoft.com/office/drawing/2014/main" id="{1E286371-F443-FD5C-BF57-FB23A8D7F4F7}"/>
+                <a16:creationId xmlns:a16="http://schemas.microsoft.com/office/drawing/2014/main" id="{970A7ABF-62FA-8BC6-90E6-6A87C2C27151}"/>
               </a:ext>
             </a:extLst>
           </p:cNvPr>
@@ -10117,7 +10054,7 @@
           <p:cNvPr id="2" name="CuadroTexto 1">
             <a:extLst>
               <a:ext uri="{FF2B5EF4-FFF2-40B4-BE49-F238E27FC236}">
-                <a16:creationId xmlns:a16="http://schemas.microsoft.com/office/drawing/2014/main" id="{F1C12A10-91CE-B5DA-9D77-267ED06AEAC2}"/>
+                <a16:creationId xmlns:a16="http://schemas.microsoft.com/office/drawing/2014/main" id="{80549B71-9D6F-09A4-A56E-F47E64164AB0}"/>
               </a:ext>
             </a:extLst>
           </p:cNvPr>
@@ -10127,7 +10064,7 @@
         <p:spPr>
           <a:xfrm>
             <a:off x="609441" y="4860334"/>
-            <a:ext cx="11199971" cy="1938992"/>
+            <a:ext cx="11199971" cy="1200329"/>
           </a:xfrm>
           <a:prstGeom prst="rect">
             <a:avLst/>
@@ -10171,39 +10108,46 @@
           <a:p>
             <a:pPr algn="just"/>
             <a:r>
-              <a:rPr lang="en-US" sz="1200" dirty="0" err="1">
-                <a:latin typeface="Arial" panose="020B0604020202020204" pitchFamily="34" charset="0"/>
-                <a:cs typeface="Arial" panose="020B0604020202020204" pitchFamily="34" charset="0"/>
-              </a:rPr>
-              <a:t>Aunque</a:t>
-            </a:r>
-            <a:r>
-              <a:rPr lang="en-US" sz="1200" dirty="0">
-                <a:latin typeface="Arial" panose="020B0604020202020204" pitchFamily="34" charset="0"/>
-                <a:cs typeface="Arial" panose="020B0604020202020204" pitchFamily="34" charset="0"/>
-              </a:rPr>
-              <a:t> no la Ventana de </a:t>
-            </a:r>
-            <a:r>
-              <a:rPr lang="en-US" sz="1200" dirty="0" err="1">
-                <a:latin typeface="Arial" panose="020B0604020202020204" pitchFamily="34" charset="0"/>
-                <a:cs typeface="Arial" panose="020B0604020202020204" pitchFamily="34" charset="0"/>
-              </a:rPr>
-              <a:t>visualización</a:t>
-            </a:r>
-            <a:r>
-              <a:rPr lang="en-US" sz="1200" dirty="0">
-                <a:latin typeface="Arial" panose="020B0604020202020204" pitchFamily="34" charset="0"/>
-                <a:cs typeface="Arial" panose="020B0604020202020204" pitchFamily="34" charset="0"/>
-              </a:rPr>
-              <a:t> no completa un </a:t>
-            </a:r>
-            <a:r>
-              <a:rPr lang="en-US" sz="1200" dirty="0" err="1">
-                <a:latin typeface="Arial" panose="020B0604020202020204" pitchFamily="34" charset="0"/>
-                <a:cs typeface="Arial" panose="020B0604020202020204" pitchFamily="34" charset="0"/>
-              </a:rPr>
-              <a:t>periodo</a:t>
+              <a:rPr lang="en-US" sz="1200" dirty="0">
+                <a:latin typeface="Arial" panose="020B0604020202020204" pitchFamily="34" charset="0"/>
+                <a:cs typeface="Arial" panose="020B0604020202020204" pitchFamily="34" charset="0"/>
+              </a:rPr>
+              <a:t>La </a:t>
+            </a:r>
+            <a:r>
+              <a:rPr lang="en-US" sz="1200" dirty="0" err="1">
+                <a:latin typeface="Arial" panose="020B0604020202020204" pitchFamily="34" charset="0"/>
+                <a:cs typeface="Arial" panose="020B0604020202020204" pitchFamily="34" charset="0"/>
+              </a:rPr>
+              <a:t>función</a:t>
+            </a:r>
+            <a:r>
+              <a:rPr lang="en-US" sz="1200" dirty="0">
+                <a:latin typeface="Arial" panose="020B0604020202020204" pitchFamily="34" charset="0"/>
+                <a:cs typeface="Arial" panose="020B0604020202020204" pitchFamily="34" charset="0"/>
+              </a:rPr>
+              <a:t> de </a:t>
+            </a:r>
+            <a:r>
+              <a:rPr lang="en-US" sz="1200" dirty="0" err="1">
+                <a:latin typeface="Arial" panose="020B0604020202020204" pitchFamily="34" charset="0"/>
+                <a:cs typeface="Arial" panose="020B0604020202020204" pitchFamily="34" charset="0"/>
+              </a:rPr>
+              <a:t>transferencia</a:t>
+            </a:r>
+            <a:r>
+              <a:rPr lang="en-US" sz="1200" dirty="0">
+                <a:latin typeface="Arial" panose="020B0604020202020204" pitchFamily="34" charset="0"/>
+                <a:cs typeface="Arial" panose="020B0604020202020204" pitchFamily="34" charset="0"/>
+              </a:rPr>
+              <a:t> es </a:t>
+            </a:r>
+            <a:r>
+              <a:rPr lang="en-US" sz="1200" dirty="0" err="1">
+                <a:latin typeface="Arial" panose="020B0604020202020204" pitchFamily="34" charset="0"/>
+                <a:cs typeface="Arial" panose="020B0604020202020204" pitchFamily="34" charset="0"/>
+              </a:rPr>
+              <a:t>periódica</a:t>
             </a:r>
             <a:r>
               <a:rPr lang="en-US" sz="1200" dirty="0">
@@ -10217,21 +10161,21 @@
                 <a:latin typeface="Arial" panose="020B0604020202020204" pitchFamily="34" charset="0"/>
                 <a:cs typeface="Arial" panose="020B0604020202020204" pitchFamily="34" charset="0"/>
               </a:rPr>
-              <a:t>completo</a:t>
-            </a:r>
-            <a:r>
-              <a:rPr lang="en-US" sz="1200" dirty="0">
-                <a:latin typeface="Arial" panose="020B0604020202020204" pitchFamily="34" charset="0"/>
-                <a:cs typeface="Arial" panose="020B0604020202020204" pitchFamily="34" charset="0"/>
-              </a:rPr>
-              <a:t>, la </a:t>
-            </a:r>
-            <a:r>
-              <a:rPr lang="en-US" sz="1200" dirty="0" err="1">
-                <a:latin typeface="Arial" panose="020B0604020202020204" pitchFamily="34" charset="0"/>
-                <a:cs typeface="Arial" panose="020B0604020202020204" pitchFamily="34" charset="0"/>
-              </a:rPr>
-              <a:t>función</a:t>
+              <a:t>según</a:t>
+            </a:r>
+            <a:r>
+              <a:rPr lang="en-US" sz="1200" dirty="0">
+                <a:latin typeface="Arial" panose="020B0604020202020204" pitchFamily="34" charset="0"/>
+                <a:cs typeface="Arial" panose="020B0604020202020204" pitchFamily="34" charset="0"/>
+              </a:rPr>
+              <a:t> la </a:t>
+            </a:r>
+            <a:r>
+              <a:rPr lang="en-US" sz="1200" dirty="0" err="1">
+                <a:latin typeface="Arial" panose="020B0604020202020204" pitchFamily="34" charset="0"/>
+                <a:cs typeface="Arial" panose="020B0604020202020204" pitchFamily="34" charset="0"/>
+              </a:rPr>
+              <a:t>longitud</a:t>
             </a:r>
             <a:r>
               <a:rPr lang="en-US" sz="1200" dirty="0">
@@ -10245,7 +10189,35 @@
                 <a:latin typeface="Arial" panose="020B0604020202020204" pitchFamily="34" charset="0"/>
                 <a:cs typeface="Arial" panose="020B0604020202020204" pitchFamily="34" charset="0"/>
               </a:rPr>
-              <a:t>transferencia</a:t>
+              <a:t>onda</a:t>
+            </a:r>
+            <a:r>
+              <a:rPr lang="en-US" sz="1200" dirty="0">
+                <a:latin typeface="Arial" panose="020B0604020202020204" pitchFamily="34" charset="0"/>
+                <a:cs typeface="Arial" panose="020B0604020202020204" pitchFamily="34" charset="0"/>
+              </a:rPr>
+              <a:t>, </a:t>
+            </a:r>
+            <a:r>
+              <a:rPr lang="en-US" sz="1200" dirty="0" err="1">
+                <a:latin typeface="Arial" panose="020B0604020202020204" pitchFamily="34" charset="0"/>
+                <a:cs typeface="Arial" panose="020B0604020202020204" pitchFamily="34" charset="0"/>
+              </a:rPr>
+              <a:t>por</a:t>
+            </a:r>
+            <a:r>
+              <a:rPr lang="en-US" sz="1200" dirty="0">
+                <a:latin typeface="Arial" panose="020B0604020202020204" pitchFamily="34" charset="0"/>
+                <a:cs typeface="Arial" panose="020B0604020202020204" pitchFamily="34" charset="0"/>
+              </a:rPr>
+              <a:t> lo </a:t>
+            </a:r>
+            <a:r>
+              <a:rPr lang="en-US" sz="1200" dirty="0" err="1">
+                <a:latin typeface="Arial" panose="020B0604020202020204" pitchFamily="34" charset="0"/>
+                <a:cs typeface="Arial" panose="020B0604020202020204" pitchFamily="34" charset="0"/>
+              </a:rPr>
+              <a:t>que</a:t>
             </a:r>
             <a:r>
               <a:rPr lang="en-US" sz="1200" dirty="0">
@@ -10266,6 +10238,20 @@
                 <a:latin typeface="Arial" panose="020B0604020202020204" pitchFamily="34" charset="0"/>
                 <a:cs typeface="Arial" panose="020B0604020202020204" pitchFamily="34" charset="0"/>
               </a:rPr>
+              <a:t> hay un patron de </a:t>
+            </a:r>
+            <a:r>
+              <a:rPr lang="en-US" sz="1200" dirty="0" err="1">
+                <a:latin typeface="Arial" panose="020B0604020202020204" pitchFamily="34" charset="0"/>
+                <a:cs typeface="Arial" panose="020B0604020202020204" pitchFamily="34" charset="0"/>
+              </a:rPr>
+              <a:t>interferencia</a:t>
+            </a:r>
+            <a:r>
+              <a:rPr lang="en-US" sz="1200" dirty="0">
+                <a:latin typeface="Arial" panose="020B0604020202020204" pitchFamily="34" charset="0"/>
+                <a:cs typeface="Arial" panose="020B0604020202020204" pitchFamily="34" charset="0"/>
+              </a:rPr>
               <a:t> </a:t>
             </a:r>
             <a:r>
@@ -10273,7 +10259,63 @@
                 <a:latin typeface="Arial" panose="020B0604020202020204" pitchFamily="34" charset="0"/>
                 <a:cs typeface="Arial" panose="020B0604020202020204" pitchFamily="34" charset="0"/>
               </a:rPr>
-              <a:t>que</a:t>
+              <a:t>donde</a:t>
+            </a:r>
+            <a:r>
+              <a:rPr lang="en-US" sz="1200" dirty="0">
+                <a:latin typeface="Arial" panose="020B0604020202020204" pitchFamily="34" charset="0"/>
+                <a:cs typeface="Arial" panose="020B0604020202020204" pitchFamily="34" charset="0"/>
+              </a:rPr>
+              <a:t> las </a:t>
+            </a:r>
+            <a:r>
+              <a:rPr lang="en-US" sz="1200" dirty="0" err="1">
+                <a:latin typeface="Arial" panose="020B0604020202020204" pitchFamily="34" charset="0"/>
+                <a:cs typeface="Arial" panose="020B0604020202020204" pitchFamily="34" charset="0"/>
+              </a:rPr>
+              <a:t>oscilaciones</a:t>
+            </a:r>
+            <a:r>
+              <a:rPr lang="en-US" sz="1200" dirty="0">
+                <a:latin typeface="Arial" panose="020B0604020202020204" pitchFamily="34" charset="0"/>
+                <a:cs typeface="Arial" panose="020B0604020202020204" pitchFamily="34" charset="0"/>
+              </a:rPr>
+              <a:t> son </a:t>
+            </a:r>
+            <a:r>
+              <a:rPr lang="en-US" sz="1200" dirty="0" err="1">
+                <a:latin typeface="Arial" panose="020B0604020202020204" pitchFamily="34" charset="0"/>
+                <a:cs typeface="Arial" panose="020B0604020202020204" pitchFamily="34" charset="0"/>
+              </a:rPr>
+              <a:t>complementarias</a:t>
+            </a:r>
+            <a:r>
+              <a:rPr lang="en-US" sz="1200" dirty="0">
+                <a:latin typeface="Arial" panose="020B0604020202020204" pitchFamily="34" charset="0"/>
+                <a:cs typeface="Arial" panose="020B0604020202020204" pitchFamily="34" charset="0"/>
+              </a:rPr>
+              <a:t> entre </a:t>
+            </a:r>
+            <a:r>
+              <a:rPr lang="en-US" sz="1200" dirty="0" err="1">
+                <a:latin typeface="Arial" panose="020B0604020202020204" pitchFamily="34" charset="0"/>
+                <a:cs typeface="Arial" panose="020B0604020202020204" pitchFamily="34" charset="0"/>
+              </a:rPr>
+              <a:t>salidas</a:t>
+            </a:r>
+            <a:r>
+              <a:rPr lang="en-US" sz="1200" dirty="0">
+                <a:latin typeface="Arial" panose="020B0604020202020204" pitchFamily="34" charset="0"/>
+                <a:cs typeface="Arial" panose="020B0604020202020204" pitchFamily="34" charset="0"/>
+              </a:rPr>
+              <a:t>. En  </a:t>
+            </a:r>
+            <a:r>
+              <a:rPr lang="en-US" sz="1200" dirty="0" err="1">
+                <a:latin typeface="Arial" panose="020B0604020202020204" pitchFamily="34" charset="0"/>
+                <a:cs typeface="Arial" panose="020B0604020202020204" pitchFamily="34" charset="0"/>
+              </a:rPr>
+              <a:t>este</a:t>
             </a:r>
             <a:r>
               <a:rPr lang="en-US" sz="1200" dirty="0">
@@ -10287,21 +10329,21 @@
                 <a:latin typeface="Arial" panose="020B0604020202020204" pitchFamily="34" charset="0"/>
                 <a:cs typeface="Arial" panose="020B0604020202020204" pitchFamily="34" charset="0"/>
               </a:rPr>
-              <a:t>tiene</a:t>
-            </a:r>
-            <a:r>
-              <a:rPr lang="en-US" sz="1200" dirty="0">
-                <a:latin typeface="Arial" panose="020B0604020202020204" pitchFamily="34" charset="0"/>
-                <a:cs typeface="Arial" panose="020B0604020202020204" pitchFamily="34" charset="0"/>
-              </a:rPr>
-              <a:t> un patron de </a:t>
-            </a:r>
-            <a:r>
-              <a:rPr lang="en-US" sz="1200" dirty="0" err="1">
-                <a:latin typeface="Arial" panose="020B0604020202020204" pitchFamily="34" charset="0"/>
-                <a:cs typeface="Arial" panose="020B0604020202020204" pitchFamily="34" charset="0"/>
-              </a:rPr>
-              <a:t>interferencia</a:t>
+              <a:t>caso</a:t>
+            </a:r>
+            <a:r>
+              <a:rPr lang="en-US" sz="1200" dirty="0">
+                <a:latin typeface="Arial" panose="020B0604020202020204" pitchFamily="34" charset="0"/>
+                <a:cs typeface="Arial" panose="020B0604020202020204" pitchFamily="34" charset="0"/>
+              </a:rPr>
+              <a:t>, al </a:t>
+            </a:r>
+            <a:r>
+              <a:rPr lang="en-US" sz="1200" dirty="0" err="1">
+                <a:latin typeface="Arial" panose="020B0604020202020204" pitchFamily="34" charset="0"/>
+                <a:cs typeface="Arial" panose="020B0604020202020204" pitchFamily="34" charset="0"/>
+              </a:rPr>
+              <a:t>haber</a:t>
             </a:r>
             <a:r>
               <a:rPr lang="en-US" sz="1200" dirty="0">
@@ -10315,7 +10357,63 @@
                 <a:latin typeface="Arial" panose="020B0604020202020204" pitchFamily="34" charset="0"/>
                 <a:cs typeface="Arial" panose="020B0604020202020204" pitchFamily="34" charset="0"/>
               </a:rPr>
-              <a:t>constructica</a:t>
+              <a:t>pérdidas</a:t>
+            </a:r>
+            <a:r>
+              <a:rPr lang="en-US" sz="1200" dirty="0">
+                <a:latin typeface="Arial" panose="020B0604020202020204" pitchFamily="34" charset="0"/>
+                <a:cs typeface="Arial" panose="020B0604020202020204" pitchFamily="34" charset="0"/>
+              </a:rPr>
+              <a:t>, </a:t>
+            </a:r>
+            <a:r>
+              <a:rPr lang="en-US" sz="1200" dirty="0" err="1">
+                <a:latin typeface="Arial" panose="020B0604020202020204" pitchFamily="34" charset="0"/>
+                <a:cs typeface="Arial" panose="020B0604020202020204" pitchFamily="34" charset="0"/>
+              </a:rPr>
+              <a:t>los</a:t>
+            </a:r>
+            <a:r>
+              <a:rPr lang="en-US" sz="1200" dirty="0">
+                <a:latin typeface="Arial" panose="020B0604020202020204" pitchFamily="34" charset="0"/>
+                <a:cs typeface="Arial" panose="020B0604020202020204" pitchFamily="34" charset="0"/>
+              </a:rPr>
+              <a:t> </a:t>
+            </a:r>
+            <a:r>
+              <a:rPr lang="en-US" sz="1200" dirty="0" err="1">
+                <a:latin typeface="Arial" panose="020B0604020202020204" pitchFamily="34" charset="0"/>
+                <a:cs typeface="Arial" panose="020B0604020202020204" pitchFamily="34" charset="0"/>
+              </a:rPr>
+              <a:t>máximos</a:t>
+            </a:r>
+            <a:r>
+              <a:rPr lang="en-US" sz="1200" dirty="0">
+                <a:latin typeface="Arial" panose="020B0604020202020204" pitchFamily="34" charset="0"/>
+                <a:cs typeface="Arial" panose="020B0604020202020204" pitchFamily="34" charset="0"/>
+              </a:rPr>
+              <a:t> son </a:t>
+            </a:r>
+            <a:r>
+              <a:rPr lang="en-US" sz="1200" dirty="0" err="1">
+                <a:latin typeface="Arial" panose="020B0604020202020204" pitchFamily="34" charset="0"/>
+                <a:cs typeface="Arial" panose="020B0604020202020204" pitchFamily="34" charset="0"/>
+              </a:rPr>
+              <a:t>más</a:t>
+            </a:r>
+            <a:r>
+              <a:rPr lang="en-US" sz="1200" dirty="0">
+                <a:latin typeface="Arial" panose="020B0604020202020204" pitchFamily="34" charset="0"/>
+                <a:cs typeface="Arial" panose="020B0604020202020204" pitchFamily="34" charset="0"/>
+              </a:rPr>
+              <a:t> </a:t>
+            </a:r>
+            <a:r>
+              <a:rPr lang="en-US" sz="1200" dirty="0" err="1">
+                <a:latin typeface="Arial" panose="020B0604020202020204" pitchFamily="34" charset="0"/>
+                <a:cs typeface="Arial" panose="020B0604020202020204" pitchFamily="34" charset="0"/>
+              </a:rPr>
+              <a:t>bajos</a:t>
             </a:r>
             <a:r>
               <a:rPr lang="en-US" sz="1200" dirty="0">
@@ -10329,35 +10427,7 @@
                 <a:latin typeface="Arial" panose="020B0604020202020204" pitchFamily="34" charset="0"/>
                 <a:cs typeface="Arial" panose="020B0604020202020204" pitchFamily="34" charset="0"/>
               </a:rPr>
-              <a:t>destructiva</a:t>
-            </a:r>
-            <a:r>
-              <a:rPr lang="en-US" sz="1200" dirty="0">
-                <a:latin typeface="Arial" panose="020B0604020202020204" pitchFamily="34" charset="0"/>
-                <a:cs typeface="Arial" panose="020B0604020202020204" pitchFamily="34" charset="0"/>
-              </a:rPr>
-              <a:t>, </a:t>
-            </a:r>
-            <a:r>
-              <a:rPr lang="en-US" sz="1200" dirty="0" err="1">
-                <a:latin typeface="Arial" panose="020B0604020202020204" pitchFamily="34" charset="0"/>
-                <a:cs typeface="Arial" panose="020B0604020202020204" pitchFamily="34" charset="0"/>
-              </a:rPr>
-              <a:t>que</a:t>
-            </a:r>
-            <a:r>
-              <a:rPr lang="en-US" sz="1200" dirty="0">
-                <a:latin typeface="Arial" panose="020B0604020202020204" pitchFamily="34" charset="0"/>
-                <a:cs typeface="Arial" panose="020B0604020202020204" pitchFamily="34" charset="0"/>
-              </a:rPr>
-              <a:t> se </a:t>
-            </a:r>
-            <a:r>
-              <a:rPr lang="en-US" sz="1200" dirty="0" err="1">
-                <a:latin typeface="Arial" panose="020B0604020202020204" pitchFamily="34" charset="0"/>
-                <a:cs typeface="Arial" panose="020B0604020202020204" pitchFamily="34" charset="0"/>
-              </a:rPr>
-              <a:t>cumple</a:t>
+              <a:t>los</a:t>
             </a:r>
             <a:r>
               <a:rPr lang="en-US" sz="1200" dirty="0">
@@ -10371,14 +10441,42 @@
                 <a:latin typeface="Arial" panose="020B0604020202020204" pitchFamily="34" charset="0"/>
                 <a:cs typeface="Arial" panose="020B0604020202020204" pitchFamily="34" charset="0"/>
               </a:rPr>
-              <a:t>cada</a:t>
-            </a:r>
-            <a:r>
-              <a:rPr lang="en-US" sz="1200" dirty="0">
-                <a:latin typeface="Arial" panose="020B0604020202020204" pitchFamily="34" charset="0"/>
-                <a:cs typeface="Arial" panose="020B0604020202020204" pitchFamily="34" charset="0"/>
-              </a:rPr>
-              <a:t> 10nm. En </a:t>
+              <a:t>mínimos</a:t>
+            </a:r>
+            <a:r>
+              <a:rPr lang="en-US" sz="1200" dirty="0">
+                <a:latin typeface="Arial" panose="020B0604020202020204" pitchFamily="34" charset="0"/>
+                <a:cs typeface="Arial" panose="020B0604020202020204" pitchFamily="34" charset="0"/>
+              </a:rPr>
+              <a:t> </a:t>
+            </a:r>
+            <a:r>
+              <a:rPr lang="en-US" sz="1200" dirty="0" err="1">
+                <a:latin typeface="Arial" panose="020B0604020202020204" pitchFamily="34" charset="0"/>
+                <a:cs typeface="Arial" panose="020B0604020202020204" pitchFamily="34" charset="0"/>
+              </a:rPr>
+              <a:t>más</a:t>
+            </a:r>
+            <a:r>
+              <a:rPr lang="en-US" sz="1200" dirty="0">
+                <a:latin typeface="Arial" panose="020B0604020202020204" pitchFamily="34" charset="0"/>
+                <a:cs typeface="Arial" panose="020B0604020202020204" pitchFamily="34" charset="0"/>
+              </a:rPr>
+              <a:t> altos, </a:t>
+            </a:r>
+            <a:r>
+              <a:rPr lang="en-US" sz="1200" dirty="0" err="1">
+                <a:latin typeface="Arial" panose="020B0604020202020204" pitchFamily="34" charset="0"/>
+                <a:cs typeface="Arial" panose="020B0604020202020204" pitchFamily="34" charset="0"/>
+              </a:rPr>
+              <a:t>disminuyendo</a:t>
+            </a:r>
+            <a:r>
+              <a:rPr lang="en-US" sz="1200" dirty="0">
+                <a:latin typeface="Arial" panose="020B0604020202020204" pitchFamily="34" charset="0"/>
+                <a:cs typeface="Arial" panose="020B0604020202020204" pitchFamily="34" charset="0"/>
+              </a:rPr>
+              <a:t> </a:t>
             </a:r>
             <a:r>
               <a:rPr lang="en-US" sz="1200" dirty="0" err="1">
@@ -10392,917 +10490,7 @@
                 <a:latin typeface="Arial" panose="020B0604020202020204" pitchFamily="34" charset="0"/>
                 <a:cs typeface="Arial" panose="020B0604020202020204" pitchFamily="34" charset="0"/>
               </a:rPr>
-              <a:t>  </a:t>
-            </a:r>
-            <a:r>
-              <a:rPr lang="en-US" sz="1200" dirty="0" err="1">
-                <a:latin typeface="Arial" panose="020B0604020202020204" pitchFamily="34" charset="0"/>
-                <a:cs typeface="Arial" panose="020B0604020202020204" pitchFamily="34" charset="0"/>
-              </a:rPr>
-              <a:t>caso</a:t>
-            </a:r>
-            <a:r>
-              <a:rPr lang="en-US" sz="1200" dirty="0">
-                <a:latin typeface="Arial" panose="020B0604020202020204" pitchFamily="34" charset="0"/>
-                <a:cs typeface="Arial" panose="020B0604020202020204" pitchFamily="34" charset="0"/>
-              </a:rPr>
-              <a:t> 2, también se </a:t>
-            </a:r>
-            <a:r>
-              <a:rPr lang="en-US" sz="1200" dirty="0" err="1">
-                <a:latin typeface="Arial" panose="020B0604020202020204" pitchFamily="34" charset="0"/>
-                <a:cs typeface="Arial" panose="020B0604020202020204" pitchFamily="34" charset="0"/>
-              </a:rPr>
-              <a:t>cumple</a:t>
-            </a:r>
-            <a:r>
-              <a:rPr lang="en-US" sz="1200" dirty="0">
-                <a:latin typeface="Arial" panose="020B0604020202020204" pitchFamily="34" charset="0"/>
-                <a:cs typeface="Arial" panose="020B0604020202020204" pitchFamily="34" charset="0"/>
-              </a:rPr>
-              <a:t> un patron </a:t>
-            </a:r>
-            <a:r>
-              <a:rPr lang="en-US" sz="1200" dirty="0" err="1">
-                <a:latin typeface="Arial" panose="020B0604020202020204" pitchFamily="34" charset="0"/>
-                <a:cs typeface="Arial" panose="020B0604020202020204" pitchFamily="34" charset="0"/>
-              </a:rPr>
-              <a:t>cada</a:t>
-            </a:r>
-            <a:r>
-              <a:rPr lang="en-US" sz="1200" dirty="0">
-                <a:latin typeface="Arial" panose="020B0604020202020204" pitchFamily="34" charset="0"/>
-                <a:cs typeface="Arial" panose="020B0604020202020204" pitchFamily="34" charset="0"/>
-              </a:rPr>
-              <a:t> 10nm, </a:t>
-            </a:r>
-            <a:r>
-              <a:rPr lang="en-US" sz="1200" dirty="0" err="1">
-                <a:latin typeface="Arial" panose="020B0604020202020204" pitchFamily="34" charset="0"/>
-                <a:cs typeface="Arial" panose="020B0604020202020204" pitchFamily="34" charset="0"/>
-              </a:rPr>
-              <a:t>pero</a:t>
-            </a:r>
-            <a:r>
-              <a:rPr lang="en-US" sz="1200" dirty="0">
-                <a:latin typeface="Arial" panose="020B0604020202020204" pitchFamily="34" charset="0"/>
-                <a:cs typeface="Arial" panose="020B0604020202020204" pitchFamily="34" charset="0"/>
-              </a:rPr>
-              <a:t> al ser la </a:t>
-            </a:r>
-            <a:r>
-              <a:rPr lang="en-US" sz="1200" dirty="0" err="1">
-                <a:latin typeface="Arial" panose="020B0604020202020204" pitchFamily="34" charset="0"/>
-                <a:cs typeface="Arial" panose="020B0604020202020204" pitchFamily="34" charset="0"/>
-              </a:rPr>
-              <a:t>distribución</a:t>
-            </a:r>
-            <a:r>
-              <a:rPr lang="en-US" sz="1200" dirty="0">
-                <a:latin typeface="Arial" panose="020B0604020202020204" pitchFamily="34" charset="0"/>
-                <a:cs typeface="Arial" panose="020B0604020202020204" pitchFamily="34" charset="0"/>
-              </a:rPr>
-              <a:t> de la </a:t>
-            </a:r>
-            <a:r>
-              <a:rPr lang="en-US" sz="1200" dirty="0" err="1">
-                <a:latin typeface="Arial" panose="020B0604020202020204" pitchFamily="34" charset="0"/>
-                <a:cs typeface="Arial" panose="020B0604020202020204" pitchFamily="34" charset="0"/>
-              </a:rPr>
-              <a:t>potencia</a:t>
-            </a:r>
-            <a:r>
-              <a:rPr lang="en-US" sz="1200" dirty="0">
-                <a:latin typeface="Arial" panose="020B0604020202020204" pitchFamily="34" charset="0"/>
-                <a:cs typeface="Arial" panose="020B0604020202020204" pitchFamily="34" charset="0"/>
-              </a:rPr>
-              <a:t> a la entrada </a:t>
-            </a:r>
-            <a:r>
-              <a:rPr lang="en-US" sz="1200" dirty="0" err="1">
-                <a:latin typeface="Arial" panose="020B0604020202020204" pitchFamily="34" charset="0"/>
-                <a:cs typeface="Arial" panose="020B0604020202020204" pitchFamily="34" charset="0"/>
-              </a:rPr>
-              <a:t>desbalanceada</a:t>
-            </a:r>
-            <a:r>
-              <a:rPr lang="en-US" sz="1200" dirty="0">
-                <a:latin typeface="Arial" panose="020B0604020202020204" pitchFamily="34" charset="0"/>
-                <a:cs typeface="Arial" panose="020B0604020202020204" pitchFamily="34" charset="0"/>
-              </a:rPr>
-              <a:t>, la </a:t>
-            </a:r>
-            <a:r>
-              <a:rPr lang="en-US" sz="1200" dirty="0" err="1">
-                <a:latin typeface="Arial" panose="020B0604020202020204" pitchFamily="34" charset="0"/>
-                <a:cs typeface="Arial" panose="020B0604020202020204" pitchFamily="34" charset="0"/>
-              </a:rPr>
-              <a:t>interferencia</a:t>
-            </a:r>
-            <a:r>
-              <a:rPr lang="en-US" sz="1200" dirty="0">
-                <a:latin typeface="Arial" panose="020B0604020202020204" pitchFamily="34" charset="0"/>
-                <a:cs typeface="Arial" panose="020B0604020202020204" pitchFamily="34" charset="0"/>
-              </a:rPr>
-              <a:t> no es tan visible. En </a:t>
-            </a:r>
-            <a:r>
-              <a:rPr lang="en-US" sz="1200" dirty="0" err="1">
-                <a:latin typeface="Arial" panose="020B0604020202020204" pitchFamily="34" charset="0"/>
-                <a:cs typeface="Arial" panose="020B0604020202020204" pitchFamily="34" charset="0"/>
-              </a:rPr>
-              <a:t>el</a:t>
-            </a:r>
-            <a:r>
-              <a:rPr lang="en-US" sz="1200" dirty="0">
-                <a:latin typeface="Arial" panose="020B0604020202020204" pitchFamily="34" charset="0"/>
-                <a:cs typeface="Arial" panose="020B0604020202020204" pitchFamily="34" charset="0"/>
-              </a:rPr>
-              <a:t> </a:t>
-            </a:r>
-            <a:r>
-              <a:rPr lang="en-US" sz="1200" dirty="0" err="1">
-                <a:latin typeface="Arial" panose="020B0604020202020204" pitchFamily="34" charset="0"/>
-                <a:cs typeface="Arial" panose="020B0604020202020204" pitchFamily="34" charset="0"/>
-              </a:rPr>
-              <a:t>caso</a:t>
-            </a:r>
-            <a:r>
-              <a:rPr lang="en-US" sz="1200" dirty="0">
-                <a:latin typeface="Arial" panose="020B0604020202020204" pitchFamily="34" charset="0"/>
-                <a:cs typeface="Arial" panose="020B0604020202020204" pitchFamily="34" charset="0"/>
-              </a:rPr>
-              <a:t> 1, </a:t>
-            </a:r>
-            <a:r>
-              <a:rPr lang="en-US" sz="1200" dirty="0" err="1">
-                <a:latin typeface="Arial" panose="020B0604020202020204" pitchFamily="34" charset="0"/>
-                <a:cs typeface="Arial" panose="020B0604020202020204" pitchFamily="34" charset="0"/>
-              </a:rPr>
-              <a:t>si</a:t>
-            </a:r>
-            <a:r>
-              <a:rPr lang="en-US" sz="1200" dirty="0">
-                <a:latin typeface="Arial" panose="020B0604020202020204" pitchFamily="34" charset="0"/>
-                <a:cs typeface="Arial" panose="020B0604020202020204" pitchFamily="34" charset="0"/>
-              </a:rPr>
-              <a:t> se </a:t>
-            </a:r>
-            <a:r>
-              <a:rPr lang="en-US" sz="1200" dirty="0" err="1">
-                <a:latin typeface="Arial" panose="020B0604020202020204" pitchFamily="34" charset="0"/>
-                <a:cs typeface="Arial" panose="020B0604020202020204" pitchFamily="34" charset="0"/>
-              </a:rPr>
-              <a:t>simula</a:t>
-            </a:r>
-            <a:r>
-              <a:rPr lang="en-US" sz="1200" dirty="0">
-                <a:latin typeface="Arial" panose="020B0604020202020204" pitchFamily="34" charset="0"/>
-                <a:cs typeface="Arial" panose="020B0604020202020204" pitchFamily="34" charset="0"/>
-              </a:rPr>
-              <a:t> un </a:t>
-            </a:r>
-            <a:r>
-              <a:rPr lang="en-US" sz="1200" dirty="0" err="1">
-                <a:latin typeface="Arial" panose="020B0604020202020204" pitchFamily="34" charset="0"/>
-                <a:cs typeface="Arial" panose="020B0604020202020204" pitchFamily="34" charset="0"/>
-              </a:rPr>
-              <a:t>periodo</a:t>
-            </a:r>
-            <a:r>
-              <a:rPr lang="en-US" sz="1200" dirty="0">
-                <a:latin typeface="Arial" panose="020B0604020202020204" pitchFamily="34" charset="0"/>
-                <a:cs typeface="Arial" panose="020B0604020202020204" pitchFamily="34" charset="0"/>
-              </a:rPr>
-              <a:t> </a:t>
-            </a:r>
-            <a:r>
-              <a:rPr lang="en-US" sz="1200" dirty="0" err="1">
-                <a:latin typeface="Arial" panose="020B0604020202020204" pitchFamily="34" charset="0"/>
-                <a:cs typeface="Arial" panose="020B0604020202020204" pitchFamily="34" charset="0"/>
-              </a:rPr>
-              <a:t>completo</a:t>
-            </a:r>
-            <a:r>
-              <a:rPr lang="en-US" sz="1200" dirty="0">
-                <a:latin typeface="Arial" panose="020B0604020202020204" pitchFamily="34" charset="0"/>
-                <a:cs typeface="Arial" panose="020B0604020202020204" pitchFamily="34" charset="0"/>
-              </a:rPr>
-              <a:t>, se </a:t>
-            </a:r>
-            <a:r>
-              <a:rPr lang="en-US" sz="1200" dirty="0" err="1">
-                <a:latin typeface="Arial" panose="020B0604020202020204" pitchFamily="34" charset="0"/>
-                <a:cs typeface="Arial" panose="020B0604020202020204" pitchFamily="34" charset="0"/>
-              </a:rPr>
-              <a:t>puede</a:t>
-            </a:r>
-            <a:r>
-              <a:rPr lang="en-US" sz="1200" dirty="0">
-                <a:latin typeface="Arial" panose="020B0604020202020204" pitchFamily="34" charset="0"/>
-                <a:cs typeface="Arial" panose="020B0604020202020204" pitchFamily="34" charset="0"/>
-              </a:rPr>
-              <a:t> </a:t>
-            </a:r>
-            <a:r>
-              <a:rPr lang="en-US" sz="1200" dirty="0" err="1">
-                <a:latin typeface="Arial" panose="020B0604020202020204" pitchFamily="34" charset="0"/>
-                <a:cs typeface="Arial" panose="020B0604020202020204" pitchFamily="34" charset="0"/>
-              </a:rPr>
-              <a:t>ver</a:t>
-            </a:r>
-            <a:r>
-              <a:rPr lang="en-US" sz="1200" dirty="0">
-                <a:latin typeface="Arial" panose="020B0604020202020204" pitchFamily="34" charset="0"/>
-                <a:cs typeface="Arial" panose="020B0604020202020204" pitchFamily="34" charset="0"/>
-              </a:rPr>
-              <a:t> </a:t>
-            </a:r>
-            <a:r>
-              <a:rPr lang="en-US" sz="1200" dirty="0" err="1">
-                <a:latin typeface="Arial" panose="020B0604020202020204" pitchFamily="34" charset="0"/>
-                <a:cs typeface="Arial" panose="020B0604020202020204" pitchFamily="34" charset="0"/>
-              </a:rPr>
-              <a:t>que</a:t>
-            </a:r>
-            <a:r>
-              <a:rPr lang="en-US" sz="1200" dirty="0">
-                <a:latin typeface="Arial" panose="020B0604020202020204" pitchFamily="34" charset="0"/>
-                <a:cs typeface="Arial" panose="020B0604020202020204" pitchFamily="34" charset="0"/>
-              </a:rPr>
-              <a:t> </a:t>
-            </a:r>
-            <a:r>
-              <a:rPr lang="en-US" sz="1200" dirty="0" err="1">
-                <a:latin typeface="Arial" panose="020B0604020202020204" pitchFamily="34" charset="0"/>
-                <a:cs typeface="Arial" panose="020B0604020202020204" pitchFamily="34" charset="0"/>
-              </a:rPr>
-              <a:t>el</a:t>
-            </a:r>
-            <a:r>
-              <a:rPr lang="en-US" sz="1200" dirty="0">
-                <a:latin typeface="Arial" panose="020B0604020202020204" pitchFamily="34" charset="0"/>
-                <a:cs typeface="Arial" panose="020B0604020202020204" pitchFamily="34" charset="0"/>
-              </a:rPr>
-              <a:t> ER(</a:t>
-            </a:r>
-            <a:r>
-              <a:rPr lang="en-US" sz="1200" dirty="0" err="1">
-                <a:latin typeface="Arial" panose="020B0604020202020204" pitchFamily="34" charset="0"/>
-                <a:cs typeface="Arial" panose="020B0604020202020204" pitchFamily="34" charset="0"/>
-              </a:rPr>
-              <a:t>db</a:t>
-            </a:r>
-            <a:r>
-              <a:rPr lang="en-US" sz="1200" dirty="0">
-                <a:latin typeface="Arial" panose="020B0604020202020204" pitchFamily="34" charset="0"/>
-                <a:cs typeface="Arial" panose="020B0604020202020204" pitchFamily="34" charset="0"/>
-              </a:rPr>
-              <a:t>) &gt;100dB; </a:t>
-            </a:r>
-            <a:r>
-              <a:rPr lang="en-US" sz="1200" dirty="0" err="1">
-                <a:latin typeface="Arial" panose="020B0604020202020204" pitchFamily="34" charset="0"/>
-                <a:cs typeface="Arial" panose="020B0604020202020204" pitchFamily="34" charset="0"/>
-              </a:rPr>
-              <a:t>en</a:t>
-            </a:r>
-            <a:r>
-              <a:rPr lang="en-US" sz="1200" dirty="0">
-                <a:latin typeface="Arial" panose="020B0604020202020204" pitchFamily="34" charset="0"/>
-                <a:cs typeface="Arial" panose="020B0604020202020204" pitchFamily="34" charset="0"/>
-              </a:rPr>
-              <a:t> </a:t>
-            </a:r>
-            <a:r>
-              <a:rPr lang="en-US" sz="1200" dirty="0" err="1">
-                <a:latin typeface="Arial" panose="020B0604020202020204" pitchFamily="34" charset="0"/>
-                <a:cs typeface="Arial" panose="020B0604020202020204" pitchFamily="34" charset="0"/>
-              </a:rPr>
-              <a:t>cambio</a:t>
-            </a:r>
-            <a:r>
-              <a:rPr lang="en-US" sz="1200" dirty="0">
-                <a:latin typeface="Arial" panose="020B0604020202020204" pitchFamily="34" charset="0"/>
-                <a:cs typeface="Arial" panose="020B0604020202020204" pitchFamily="34" charset="0"/>
-              </a:rPr>
-              <a:t>, </a:t>
-            </a:r>
-            <a:r>
-              <a:rPr lang="en-US" sz="1200" dirty="0" err="1">
-                <a:latin typeface="Arial" panose="020B0604020202020204" pitchFamily="34" charset="0"/>
-                <a:cs typeface="Arial" panose="020B0604020202020204" pitchFamily="34" charset="0"/>
-              </a:rPr>
-              <a:t>en</a:t>
-            </a:r>
-            <a:r>
-              <a:rPr lang="en-US" sz="1200" dirty="0">
-                <a:latin typeface="Arial" panose="020B0604020202020204" pitchFamily="34" charset="0"/>
-                <a:cs typeface="Arial" panose="020B0604020202020204" pitchFamily="34" charset="0"/>
-              </a:rPr>
-              <a:t> </a:t>
-            </a:r>
-            <a:r>
-              <a:rPr lang="en-US" sz="1200" dirty="0" err="1">
-                <a:latin typeface="Arial" panose="020B0604020202020204" pitchFamily="34" charset="0"/>
-                <a:cs typeface="Arial" panose="020B0604020202020204" pitchFamily="34" charset="0"/>
-              </a:rPr>
-              <a:t>el</a:t>
-            </a:r>
-            <a:r>
-              <a:rPr lang="en-US" sz="1200" dirty="0">
-                <a:latin typeface="Arial" panose="020B0604020202020204" pitchFamily="34" charset="0"/>
-                <a:cs typeface="Arial" panose="020B0604020202020204" pitchFamily="34" charset="0"/>
-              </a:rPr>
-              <a:t> </a:t>
-            </a:r>
-            <a:r>
-              <a:rPr lang="en-US" sz="1200" dirty="0" err="1">
-                <a:latin typeface="Arial" panose="020B0604020202020204" pitchFamily="34" charset="0"/>
-                <a:cs typeface="Arial" panose="020B0604020202020204" pitchFamily="34" charset="0"/>
-              </a:rPr>
-              <a:t>caso</a:t>
-            </a:r>
-            <a:r>
-              <a:rPr lang="en-US" sz="1200" dirty="0">
-                <a:latin typeface="Arial" panose="020B0604020202020204" pitchFamily="34" charset="0"/>
-                <a:cs typeface="Arial" panose="020B0604020202020204" pitchFamily="34" charset="0"/>
-              </a:rPr>
-              <a:t> 2, ER (dB) = 12.5dB. Esto se </a:t>
-            </a:r>
-            <a:r>
-              <a:rPr lang="en-US" sz="1200" dirty="0" err="1">
-                <a:latin typeface="Arial" panose="020B0604020202020204" pitchFamily="34" charset="0"/>
-                <a:cs typeface="Arial" panose="020B0604020202020204" pitchFamily="34" charset="0"/>
-              </a:rPr>
-              <a:t>debe</a:t>
-            </a:r>
-            <a:r>
-              <a:rPr lang="en-US" sz="1200" dirty="0">
-                <a:latin typeface="Arial" panose="020B0604020202020204" pitchFamily="34" charset="0"/>
-                <a:cs typeface="Arial" panose="020B0604020202020204" pitchFamily="34" charset="0"/>
-              </a:rPr>
-              <a:t> a </a:t>
-            </a:r>
-            <a:r>
-              <a:rPr lang="en-US" sz="1200" dirty="0" err="1">
-                <a:latin typeface="Arial" panose="020B0604020202020204" pitchFamily="34" charset="0"/>
-                <a:cs typeface="Arial" panose="020B0604020202020204" pitchFamily="34" charset="0"/>
-              </a:rPr>
-              <a:t>que</a:t>
-            </a:r>
-            <a:r>
-              <a:rPr lang="en-US" sz="1200" dirty="0">
-                <a:latin typeface="Arial" panose="020B0604020202020204" pitchFamily="34" charset="0"/>
-                <a:cs typeface="Arial" panose="020B0604020202020204" pitchFamily="34" charset="0"/>
-              </a:rPr>
-              <a:t> </a:t>
-            </a:r>
-            <a:r>
-              <a:rPr lang="en-US" sz="1200" dirty="0" err="1">
-                <a:latin typeface="Arial" panose="020B0604020202020204" pitchFamily="34" charset="0"/>
-                <a:cs typeface="Arial" panose="020B0604020202020204" pitchFamily="34" charset="0"/>
-              </a:rPr>
-              <a:t>el</a:t>
-            </a:r>
-            <a:r>
-              <a:rPr lang="en-US" sz="1200" dirty="0">
-                <a:latin typeface="Arial" panose="020B0604020202020204" pitchFamily="34" charset="0"/>
-                <a:cs typeface="Arial" panose="020B0604020202020204" pitchFamily="34" charset="0"/>
-              </a:rPr>
-              <a:t> </a:t>
-            </a:r>
-            <a:r>
-              <a:rPr lang="en-US" sz="1200" dirty="0" err="1">
-                <a:latin typeface="Arial" panose="020B0604020202020204" pitchFamily="34" charset="0"/>
-                <a:cs typeface="Arial" panose="020B0604020202020204" pitchFamily="34" charset="0"/>
-              </a:rPr>
-              <a:t>acoplador</a:t>
-            </a:r>
-            <a:r>
-              <a:rPr lang="en-US" sz="1200" dirty="0">
-                <a:latin typeface="Arial" panose="020B0604020202020204" pitchFamily="34" charset="0"/>
-                <a:cs typeface="Arial" panose="020B0604020202020204" pitchFamily="34" charset="0"/>
-              </a:rPr>
-              <a:t> de entrada no </a:t>
-            </a:r>
-            <a:r>
-              <a:rPr lang="en-US" sz="1200" dirty="0" err="1">
-                <a:latin typeface="Arial" panose="020B0604020202020204" pitchFamily="34" charset="0"/>
-                <a:cs typeface="Arial" panose="020B0604020202020204" pitchFamily="34" charset="0"/>
-              </a:rPr>
-              <a:t>reparte</a:t>
-            </a:r>
-            <a:r>
-              <a:rPr lang="en-US" sz="1200" dirty="0">
-                <a:latin typeface="Arial" panose="020B0604020202020204" pitchFamily="34" charset="0"/>
-                <a:cs typeface="Arial" panose="020B0604020202020204" pitchFamily="34" charset="0"/>
-              </a:rPr>
-              <a:t> la </a:t>
-            </a:r>
-            <a:r>
-              <a:rPr lang="en-US" sz="1200" dirty="0" err="1">
-                <a:latin typeface="Arial" panose="020B0604020202020204" pitchFamily="34" charset="0"/>
-                <a:cs typeface="Arial" panose="020B0604020202020204" pitchFamily="34" charset="0"/>
-              </a:rPr>
-              <a:t>potencia</a:t>
-            </a:r>
-            <a:r>
-              <a:rPr lang="en-US" sz="1200" dirty="0">
-                <a:latin typeface="Arial" panose="020B0604020202020204" pitchFamily="34" charset="0"/>
-                <a:cs typeface="Arial" panose="020B0604020202020204" pitchFamily="34" charset="0"/>
-              </a:rPr>
-              <a:t> </a:t>
-            </a:r>
-            <a:r>
-              <a:rPr lang="en-US" sz="1200" dirty="0" err="1">
-                <a:latin typeface="Arial" panose="020B0604020202020204" pitchFamily="34" charset="0"/>
-                <a:cs typeface="Arial" panose="020B0604020202020204" pitchFamily="34" charset="0"/>
-              </a:rPr>
-              <a:t>por</a:t>
-            </a:r>
-            <a:r>
-              <a:rPr lang="en-US" sz="1200" dirty="0">
-                <a:latin typeface="Arial" panose="020B0604020202020204" pitchFamily="34" charset="0"/>
-                <a:cs typeface="Arial" panose="020B0604020202020204" pitchFamily="34" charset="0"/>
-              </a:rPr>
-              <a:t> </a:t>
-            </a:r>
-            <a:r>
-              <a:rPr lang="en-US" sz="1200" dirty="0" err="1">
-                <a:latin typeface="Arial" panose="020B0604020202020204" pitchFamily="34" charset="0"/>
-                <a:cs typeface="Arial" panose="020B0604020202020204" pitchFamily="34" charset="0"/>
-              </a:rPr>
-              <a:t>igual</a:t>
-            </a:r>
-            <a:r>
-              <a:rPr lang="en-US" sz="1200" dirty="0">
-                <a:latin typeface="Arial" panose="020B0604020202020204" pitchFamily="34" charset="0"/>
-                <a:cs typeface="Arial" panose="020B0604020202020204" pitchFamily="34" charset="0"/>
-              </a:rPr>
-              <a:t> y, </a:t>
-            </a:r>
-            <a:r>
-              <a:rPr lang="en-US" sz="1200" dirty="0" err="1">
-                <a:latin typeface="Arial" panose="020B0604020202020204" pitchFamily="34" charset="0"/>
-                <a:cs typeface="Arial" panose="020B0604020202020204" pitchFamily="34" charset="0"/>
-              </a:rPr>
-              <a:t>en</a:t>
-            </a:r>
-            <a:r>
-              <a:rPr lang="en-US" sz="1200" dirty="0">
-                <a:latin typeface="Arial" panose="020B0604020202020204" pitchFamily="34" charset="0"/>
-                <a:cs typeface="Arial" panose="020B0604020202020204" pitchFamily="34" charset="0"/>
-              </a:rPr>
-              <a:t> </a:t>
-            </a:r>
-            <a:r>
-              <a:rPr lang="en-US" sz="1200" dirty="0" err="1">
-                <a:latin typeface="Arial" panose="020B0604020202020204" pitchFamily="34" charset="0"/>
-                <a:cs typeface="Arial" panose="020B0604020202020204" pitchFamily="34" charset="0"/>
-              </a:rPr>
-              <a:t>concreto</a:t>
-            </a:r>
-            <a:r>
-              <a:rPr lang="en-US" sz="1200" dirty="0">
-                <a:latin typeface="Arial" panose="020B0604020202020204" pitchFamily="34" charset="0"/>
-                <a:cs typeface="Arial" panose="020B0604020202020204" pitchFamily="34" charset="0"/>
-              </a:rPr>
-              <a:t>, </a:t>
-            </a:r>
-            <a:r>
-              <a:rPr lang="en-US" sz="1200" dirty="0" err="1">
-                <a:latin typeface="Arial" panose="020B0604020202020204" pitchFamily="34" charset="0"/>
-                <a:cs typeface="Arial" panose="020B0604020202020204" pitchFamily="34" charset="0"/>
-              </a:rPr>
-              <a:t>envía</a:t>
-            </a:r>
-            <a:r>
-              <a:rPr lang="en-US" sz="1200" dirty="0">
-                <a:latin typeface="Arial" panose="020B0604020202020204" pitchFamily="34" charset="0"/>
-                <a:cs typeface="Arial" panose="020B0604020202020204" pitchFamily="34" charset="0"/>
-              </a:rPr>
-              <a:t> </a:t>
-            </a:r>
-            <a:r>
-              <a:rPr lang="en-US" sz="1200" dirty="0" err="1">
-                <a:latin typeface="Arial" panose="020B0604020202020204" pitchFamily="34" charset="0"/>
-                <a:cs typeface="Arial" panose="020B0604020202020204" pitchFamily="34" charset="0"/>
-              </a:rPr>
-              <a:t>menos</a:t>
-            </a:r>
-            <a:r>
-              <a:rPr lang="en-US" sz="1200" dirty="0">
-                <a:latin typeface="Arial" panose="020B0604020202020204" pitchFamily="34" charset="0"/>
-                <a:cs typeface="Arial" panose="020B0604020202020204" pitchFamily="34" charset="0"/>
-              </a:rPr>
-              <a:t> </a:t>
-            </a:r>
-            <a:r>
-              <a:rPr lang="en-US" sz="1200" dirty="0" err="1">
-                <a:latin typeface="Arial" panose="020B0604020202020204" pitchFamily="34" charset="0"/>
-                <a:cs typeface="Arial" panose="020B0604020202020204" pitchFamily="34" charset="0"/>
-              </a:rPr>
-              <a:t>potencia</a:t>
-            </a:r>
-            <a:r>
-              <a:rPr lang="en-US" sz="1200" dirty="0">
-                <a:latin typeface="Arial" panose="020B0604020202020204" pitchFamily="34" charset="0"/>
-                <a:cs typeface="Arial" panose="020B0604020202020204" pitchFamily="34" charset="0"/>
-              </a:rPr>
-              <a:t> a la </a:t>
-            </a:r>
-            <a:r>
-              <a:rPr lang="en-US" sz="1200" dirty="0" err="1">
-                <a:latin typeface="Arial" panose="020B0604020202020204" pitchFamily="34" charset="0"/>
-                <a:cs typeface="Arial" panose="020B0604020202020204" pitchFamily="34" charset="0"/>
-              </a:rPr>
-              <a:t>guía</a:t>
-            </a:r>
-            <a:r>
-              <a:rPr lang="en-US" sz="1200" dirty="0">
-                <a:latin typeface="Arial" panose="020B0604020202020204" pitchFamily="34" charset="0"/>
-                <a:cs typeface="Arial" panose="020B0604020202020204" pitchFamily="34" charset="0"/>
-              </a:rPr>
-              <a:t> con </a:t>
-            </a:r>
-            <a:r>
-              <a:rPr lang="en-US" sz="1200" dirty="0" err="1">
-                <a:latin typeface="Arial" panose="020B0604020202020204" pitchFamily="34" charset="0"/>
-                <a:cs typeface="Arial" panose="020B0604020202020204" pitchFamily="34" charset="0"/>
-              </a:rPr>
-              <a:t>desfase</a:t>
-            </a:r>
-            <a:r>
-              <a:rPr lang="en-US" sz="1200" dirty="0">
-                <a:latin typeface="Arial" panose="020B0604020202020204" pitchFamily="34" charset="0"/>
-                <a:cs typeface="Arial" panose="020B0604020202020204" pitchFamily="34" charset="0"/>
-              </a:rPr>
-              <a:t> </a:t>
-            </a:r>
-            <a:r>
-              <a:rPr lang="en-US" sz="1200" dirty="0" err="1">
-                <a:latin typeface="Arial" panose="020B0604020202020204" pitchFamily="34" charset="0"/>
-                <a:cs typeface="Arial" panose="020B0604020202020204" pitchFamily="34" charset="0"/>
-              </a:rPr>
-              <a:t>en</a:t>
-            </a:r>
-            <a:r>
-              <a:rPr lang="en-US" sz="1200" dirty="0">
-                <a:latin typeface="Arial" panose="020B0604020202020204" pitchFamily="34" charset="0"/>
-                <a:cs typeface="Arial" panose="020B0604020202020204" pitchFamily="34" charset="0"/>
-              </a:rPr>
-              <a:t> </a:t>
-            </a:r>
-            <a:r>
-              <a:rPr lang="en-US" sz="1200" dirty="0" err="1">
-                <a:latin typeface="Arial" panose="020B0604020202020204" pitchFamily="34" charset="0"/>
-                <a:cs typeface="Arial" panose="020B0604020202020204" pitchFamily="34" charset="0"/>
-              </a:rPr>
-              <a:t>el</a:t>
-            </a:r>
-            <a:r>
-              <a:rPr lang="en-US" sz="1200" dirty="0">
-                <a:latin typeface="Arial" panose="020B0604020202020204" pitchFamily="34" charset="0"/>
-                <a:cs typeface="Arial" panose="020B0604020202020204" pitchFamily="34" charset="0"/>
-              </a:rPr>
-              <a:t> </a:t>
-            </a:r>
-            <a:r>
-              <a:rPr lang="en-US" sz="1200" dirty="0" err="1">
-                <a:latin typeface="Arial" panose="020B0604020202020204" pitchFamily="34" charset="0"/>
-                <a:cs typeface="Arial" panose="020B0604020202020204" pitchFamily="34" charset="0"/>
-              </a:rPr>
-              <a:t>brazo</a:t>
-            </a:r>
-            <a:r>
-              <a:rPr lang="en-US" sz="1200" dirty="0">
-                <a:latin typeface="Arial" panose="020B0604020202020204" pitchFamily="34" charset="0"/>
-                <a:cs typeface="Arial" panose="020B0604020202020204" pitchFamily="34" charset="0"/>
-              </a:rPr>
-              <a:t>, </a:t>
-            </a:r>
-            <a:r>
-              <a:rPr lang="en-US" sz="1200" dirty="0" err="1">
-                <a:latin typeface="Arial" panose="020B0604020202020204" pitchFamily="34" charset="0"/>
-                <a:cs typeface="Arial" panose="020B0604020202020204" pitchFamily="34" charset="0"/>
-              </a:rPr>
-              <a:t>que</a:t>
-            </a:r>
-            <a:r>
-              <a:rPr lang="en-US" sz="1200" dirty="0">
-                <a:latin typeface="Arial" panose="020B0604020202020204" pitchFamily="34" charset="0"/>
-                <a:cs typeface="Arial" panose="020B0604020202020204" pitchFamily="34" charset="0"/>
-              </a:rPr>
-              <a:t> </a:t>
-            </a:r>
-            <a:r>
-              <a:rPr lang="en-US" sz="1200" dirty="0" err="1">
-                <a:latin typeface="Arial" panose="020B0604020202020204" pitchFamily="34" charset="0"/>
-                <a:cs typeface="Arial" panose="020B0604020202020204" pitchFamily="34" charset="0"/>
-              </a:rPr>
-              <a:t>además</a:t>
-            </a:r>
-            <a:r>
-              <a:rPr lang="en-US" sz="1200" dirty="0">
-                <a:latin typeface="Arial" panose="020B0604020202020204" pitchFamily="34" charset="0"/>
-                <a:cs typeface="Arial" panose="020B0604020202020204" pitchFamily="34" charset="0"/>
-              </a:rPr>
-              <a:t> </a:t>
-            </a:r>
-            <a:r>
-              <a:rPr lang="en-US" sz="1200" dirty="0" err="1">
-                <a:latin typeface="Arial" panose="020B0604020202020204" pitchFamily="34" charset="0"/>
-                <a:cs typeface="Arial" panose="020B0604020202020204" pitchFamily="34" charset="0"/>
-              </a:rPr>
-              <a:t>tiene</a:t>
-            </a:r>
-            <a:r>
-              <a:rPr lang="en-US" sz="1200" dirty="0">
-                <a:latin typeface="Arial" panose="020B0604020202020204" pitchFamily="34" charset="0"/>
-                <a:cs typeface="Arial" panose="020B0604020202020204" pitchFamily="34" charset="0"/>
-              </a:rPr>
-              <a:t> </a:t>
-            </a:r>
-            <a:r>
-              <a:rPr lang="en-US" sz="1200" dirty="0" err="1">
-                <a:latin typeface="Arial" panose="020B0604020202020204" pitchFamily="34" charset="0"/>
-                <a:cs typeface="Arial" panose="020B0604020202020204" pitchFamily="34" charset="0"/>
-              </a:rPr>
-              <a:t>más</a:t>
-            </a:r>
-            <a:r>
-              <a:rPr lang="en-US" sz="1200" dirty="0">
-                <a:latin typeface="Arial" panose="020B0604020202020204" pitchFamily="34" charset="0"/>
-                <a:cs typeface="Arial" panose="020B0604020202020204" pitchFamily="34" charset="0"/>
-              </a:rPr>
-              <a:t> </a:t>
-            </a:r>
-            <a:r>
-              <a:rPr lang="en-US" sz="1200" dirty="0" err="1">
-                <a:latin typeface="Arial" panose="020B0604020202020204" pitchFamily="34" charset="0"/>
-                <a:cs typeface="Arial" panose="020B0604020202020204" pitchFamily="34" charset="0"/>
-              </a:rPr>
-              <a:t>pérdidas</a:t>
-            </a:r>
-            <a:r>
-              <a:rPr lang="en-US" sz="1200" dirty="0">
-                <a:latin typeface="Arial" panose="020B0604020202020204" pitchFamily="34" charset="0"/>
-                <a:cs typeface="Arial" panose="020B0604020202020204" pitchFamily="34" charset="0"/>
-              </a:rPr>
-              <a:t>. El </a:t>
-            </a:r>
-            <a:r>
-              <a:rPr lang="en-US" sz="1200" dirty="0" err="1">
-                <a:latin typeface="Arial" panose="020B0604020202020204" pitchFamily="34" charset="0"/>
-                <a:cs typeface="Arial" panose="020B0604020202020204" pitchFamily="34" charset="0"/>
-              </a:rPr>
-              <a:t>resultado</a:t>
-            </a:r>
-            <a:r>
-              <a:rPr lang="en-US" sz="1200" dirty="0">
-                <a:latin typeface="Arial" panose="020B0604020202020204" pitchFamily="34" charset="0"/>
-                <a:cs typeface="Arial" panose="020B0604020202020204" pitchFamily="34" charset="0"/>
-              </a:rPr>
-              <a:t> es un Ratio de </a:t>
-            </a:r>
-            <a:r>
-              <a:rPr lang="en-US" sz="1200" dirty="0" err="1">
-                <a:latin typeface="Arial" panose="020B0604020202020204" pitchFamily="34" charset="0"/>
-                <a:cs typeface="Arial" panose="020B0604020202020204" pitchFamily="34" charset="0"/>
-              </a:rPr>
-              <a:t>excitación</a:t>
-            </a:r>
-            <a:r>
-              <a:rPr lang="en-US" sz="1200" dirty="0">
-                <a:latin typeface="Arial" panose="020B0604020202020204" pitchFamily="34" charset="0"/>
-                <a:cs typeface="Arial" panose="020B0604020202020204" pitchFamily="34" charset="0"/>
-              </a:rPr>
-              <a:t> </a:t>
-            </a:r>
-            <a:r>
-              <a:rPr lang="en-US" sz="1200" dirty="0" err="1">
-                <a:latin typeface="Arial" panose="020B0604020202020204" pitchFamily="34" charset="0"/>
-                <a:cs typeface="Arial" panose="020B0604020202020204" pitchFamily="34" charset="0"/>
-              </a:rPr>
-              <a:t>menor</a:t>
-            </a:r>
-            <a:r>
-              <a:rPr lang="en-US" sz="1200" dirty="0">
-                <a:latin typeface="Arial" panose="020B0604020202020204" pitchFamily="34" charset="0"/>
-                <a:cs typeface="Arial" panose="020B0604020202020204" pitchFamily="34" charset="0"/>
-              </a:rPr>
-              <a:t>. Para </a:t>
-            </a:r>
-            <a:r>
-              <a:rPr lang="en-US" sz="1200" dirty="0" err="1">
-                <a:latin typeface="Arial" panose="020B0604020202020204" pitchFamily="34" charset="0"/>
-                <a:cs typeface="Arial" panose="020B0604020202020204" pitchFamily="34" charset="0"/>
-              </a:rPr>
-              <a:t>compensar</a:t>
-            </a:r>
-            <a:r>
-              <a:rPr lang="en-US" sz="1200" dirty="0">
-                <a:latin typeface="Arial" panose="020B0604020202020204" pitchFamily="34" charset="0"/>
-                <a:cs typeface="Arial" panose="020B0604020202020204" pitchFamily="34" charset="0"/>
-              </a:rPr>
-              <a:t> las </a:t>
-            </a:r>
-            <a:r>
-              <a:rPr lang="en-US" sz="1200" dirty="0" err="1">
-                <a:latin typeface="Arial" panose="020B0604020202020204" pitchFamily="34" charset="0"/>
-                <a:cs typeface="Arial" panose="020B0604020202020204" pitchFamily="34" charset="0"/>
-              </a:rPr>
-              <a:t>pérdidas</a:t>
-            </a:r>
-            <a:r>
-              <a:rPr lang="en-US" sz="1200" dirty="0">
-                <a:latin typeface="Arial" panose="020B0604020202020204" pitchFamily="34" charset="0"/>
-                <a:cs typeface="Arial" panose="020B0604020202020204" pitchFamily="34" charset="0"/>
-              </a:rPr>
-              <a:t> del </a:t>
-            </a:r>
-            <a:r>
-              <a:rPr lang="en-US" sz="1200" dirty="0" err="1">
-                <a:latin typeface="Arial" panose="020B0604020202020204" pitchFamily="34" charset="0"/>
-                <a:cs typeface="Arial" panose="020B0604020202020204" pitchFamily="34" charset="0"/>
-              </a:rPr>
-              <a:t>brazo</a:t>
-            </a:r>
-            <a:r>
-              <a:rPr lang="en-US" sz="1200" dirty="0">
-                <a:latin typeface="Arial" panose="020B0604020202020204" pitchFamily="34" charset="0"/>
-                <a:cs typeface="Arial" panose="020B0604020202020204" pitchFamily="34" charset="0"/>
-              </a:rPr>
-              <a:t> </a:t>
-            </a:r>
-            <a:r>
-              <a:rPr lang="en-US" sz="1200" dirty="0" err="1">
-                <a:latin typeface="Arial" panose="020B0604020202020204" pitchFamily="34" charset="0"/>
-                <a:cs typeface="Arial" panose="020B0604020202020204" pitchFamily="34" charset="0"/>
-              </a:rPr>
-              <a:t>más</a:t>
-            </a:r>
-            <a:r>
-              <a:rPr lang="en-US" sz="1200" dirty="0">
-                <a:latin typeface="Arial" panose="020B0604020202020204" pitchFamily="34" charset="0"/>
-                <a:cs typeface="Arial" panose="020B0604020202020204" pitchFamily="34" charset="0"/>
-              </a:rPr>
-              <a:t> largo, </a:t>
-            </a:r>
-            <a:r>
-              <a:rPr lang="en-US" sz="1200" dirty="0" err="1">
-                <a:latin typeface="Arial" panose="020B0604020202020204" pitchFamily="34" charset="0"/>
-                <a:cs typeface="Arial" panose="020B0604020202020204" pitchFamily="34" charset="0"/>
-              </a:rPr>
-              <a:t>el</a:t>
-            </a:r>
-            <a:r>
-              <a:rPr lang="en-US" sz="1200" dirty="0">
-                <a:latin typeface="Arial" panose="020B0604020202020204" pitchFamily="34" charset="0"/>
-                <a:cs typeface="Arial" panose="020B0604020202020204" pitchFamily="34" charset="0"/>
-              </a:rPr>
-              <a:t> </a:t>
-            </a:r>
-            <a:r>
-              <a:rPr lang="en-US" sz="1200" dirty="0" err="1">
-                <a:latin typeface="Arial" panose="020B0604020202020204" pitchFamily="34" charset="0"/>
-                <a:cs typeface="Arial" panose="020B0604020202020204" pitchFamily="34" charset="0"/>
-              </a:rPr>
-              <a:t>acoplador</a:t>
-            </a:r>
-            <a:r>
-              <a:rPr lang="en-US" sz="1200" dirty="0">
-                <a:latin typeface="Arial" panose="020B0604020202020204" pitchFamily="34" charset="0"/>
-                <a:cs typeface="Arial" panose="020B0604020202020204" pitchFamily="34" charset="0"/>
-              </a:rPr>
-              <a:t> de entrada </a:t>
-            </a:r>
-            <a:r>
-              <a:rPr lang="en-US" sz="1200" dirty="0" err="1">
-                <a:latin typeface="Arial" panose="020B0604020202020204" pitchFamily="34" charset="0"/>
-                <a:cs typeface="Arial" panose="020B0604020202020204" pitchFamily="34" charset="0"/>
-              </a:rPr>
-              <a:t>debe</a:t>
-            </a:r>
-            <a:r>
-              <a:rPr lang="en-US" sz="1200" dirty="0">
-                <a:latin typeface="Arial" panose="020B0604020202020204" pitchFamily="34" charset="0"/>
-                <a:cs typeface="Arial" panose="020B0604020202020204" pitchFamily="34" charset="0"/>
-              </a:rPr>
-              <a:t> </a:t>
-            </a:r>
-            <a:r>
-              <a:rPr lang="en-US" sz="1200" dirty="0" err="1">
-                <a:latin typeface="Arial" panose="020B0604020202020204" pitchFamily="34" charset="0"/>
-                <a:cs typeface="Arial" panose="020B0604020202020204" pitchFamily="34" charset="0"/>
-              </a:rPr>
-              <a:t>entregar</a:t>
-            </a:r>
-            <a:r>
-              <a:rPr lang="en-US" sz="1200" dirty="0">
-                <a:latin typeface="Arial" panose="020B0604020202020204" pitchFamily="34" charset="0"/>
-                <a:cs typeface="Arial" panose="020B0604020202020204" pitchFamily="34" charset="0"/>
-              </a:rPr>
-              <a:t> </a:t>
-            </a:r>
-            <a:r>
-              <a:rPr lang="en-US" sz="1200" dirty="0" err="1">
-                <a:latin typeface="Arial" panose="020B0604020202020204" pitchFamily="34" charset="0"/>
-                <a:cs typeface="Arial" panose="020B0604020202020204" pitchFamily="34" charset="0"/>
-              </a:rPr>
-              <a:t>más</a:t>
-            </a:r>
-            <a:r>
-              <a:rPr lang="en-US" sz="1200" dirty="0">
-                <a:latin typeface="Arial" panose="020B0604020202020204" pitchFamily="34" charset="0"/>
-                <a:cs typeface="Arial" panose="020B0604020202020204" pitchFamily="34" charset="0"/>
-              </a:rPr>
-              <a:t> </a:t>
-            </a:r>
-            <a:r>
-              <a:rPr lang="en-US" sz="1200" dirty="0" err="1">
-                <a:latin typeface="Arial" panose="020B0604020202020204" pitchFamily="34" charset="0"/>
-                <a:cs typeface="Arial" panose="020B0604020202020204" pitchFamily="34" charset="0"/>
-              </a:rPr>
-              <a:t>potencia</a:t>
-            </a:r>
-            <a:r>
-              <a:rPr lang="en-US" sz="1200" dirty="0">
-                <a:latin typeface="Arial" panose="020B0604020202020204" pitchFamily="34" charset="0"/>
-                <a:cs typeface="Arial" panose="020B0604020202020204" pitchFamily="34" charset="0"/>
-              </a:rPr>
-              <a:t> a la </a:t>
-            </a:r>
-            <a:r>
-              <a:rPr lang="en-US" sz="1200" dirty="0" err="1">
-                <a:latin typeface="Arial" panose="020B0604020202020204" pitchFamily="34" charset="0"/>
-                <a:cs typeface="Arial" panose="020B0604020202020204" pitchFamily="34" charset="0"/>
-              </a:rPr>
-              <a:t>guía</a:t>
-            </a:r>
-            <a:r>
-              <a:rPr lang="en-US" sz="1200" dirty="0">
-                <a:latin typeface="Arial" panose="020B0604020202020204" pitchFamily="34" charset="0"/>
-                <a:cs typeface="Arial" panose="020B0604020202020204" pitchFamily="34" charset="0"/>
-              </a:rPr>
-              <a:t> con </a:t>
-            </a:r>
-            <a:r>
-              <a:rPr lang="en-US" sz="1200" dirty="0" err="1">
-                <a:latin typeface="Arial" panose="020B0604020202020204" pitchFamily="34" charset="0"/>
-                <a:cs typeface="Arial" panose="020B0604020202020204" pitchFamily="34" charset="0"/>
-              </a:rPr>
-              <a:t>el</a:t>
-            </a:r>
-            <a:r>
-              <a:rPr lang="en-US" sz="1200" dirty="0">
-                <a:latin typeface="Arial" panose="020B0604020202020204" pitchFamily="34" charset="0"/>
-                <a:cs typeface="Arial" panose="020B0604020202020204" pitchFamily="34" charset="0"/>
-              </a:rPr>
-              <a:t> </a:t>
-            </a:r>
-            <a:r>
-              <a:rPr lang="en-US" sz="1200" dirty="0" err="1">
-                <a:latin typeface="Arial" panose="020B0604020202020204" pitchFamily="34" charset="0"/>
-                <a:cs typeface="Arial" panose="020B0604020202020204" pitchFamily="34" charset="0"/>
-              </a:rPr>
-              <a:t>brazo</a:t>
-            </a:r>
-            <a:r>
-              <a:rPr lang="en-US" sz="1200" dirty="0">
-                <a:latin typeface="Arial" panose="020B0604020202020204" pitchFamily="34" charset="0"/>
-                <a:cs typeface="Arial" panose="020B0604020202020204" pitchFamily="34" charset="0"/>
-              </a:rPr>
-              <a:t> </a:t>
-            </a:r>
-            <a:r>
-              <a:rPr lang="en-US" sz="1200" dirty="0" err="1">
-                <a:latin typeface="Arial" panose="020B0604020202020204" pitchFamily="34" charset="0"/>
-                <a:cs typeface="Arial" panose="020B0604020202020204" pitchFamily="34" charset="0"/>
-              </a:rPr>
-              <a:t>más</a:t>
-            </a:r>
-            <a:r>
-              <a:rPr lang="en-US" sz="1200" dirty="0">
-                <a:latin typeface="Arial" panose="020B0604020202020204" pitchFamily="34" charset="0"/>
-                <a:cs typeface="Arial" panose="020B0604020202020204" pitchFamily="34" charset="0"/>
-              </a:rPr>
-              <a:t> largo, es </a:t>
-            </a:r>
-            <a:r>
-              <a:rPr lang="en-US" sz="1200" dirty="0" err="1">
-                <a:latin typeface="Arial" panose="020B0604020202020204" pitchFamily="34" charset="0"/>
-                <a:cs typeface="Arial" panose="020B0604020202020204" pitchFamily="34" charset="0"/>
-              </a:rPr>
-              <a:t>decir</a:t>
-            </a:r>
-            <a:r>
-              <a:rPr lang="en-US" sz="1200" dirty="0">
-                <a:latin typeface="Arial" panose="020B0604020202020204" pitchFamily="34" charset="0"/>
-                <a:cs typeface="Arial" panose="020B0604020202020204" pitchFamily="34" charset="0"/>
-              </a:rPr>
-              <a:t>, K&gt;0.5. Con Ka=0.6, ER = 40dB.</a:t>
+              <a:t> ER=1.53dB.</a:t>
             </a:r>
           </a:p>
           <a:p>
@@ -11319,7 +10507,7 @@
           <p:cNvPr id="4" name="Rectángulo 3">
             <a:extLst>
               <a:ext uri="{FF2B5EF4-FFF2-40B4-BE49-F238E27FC236}">
-                <a16:creationId xmlns:a16="http://schemas.microsoft.com/office/drawing/2014/main" id="{FDBAE930-4EE5-671B-4DE7-6BC60C48E7C0}"/>
+                <a16:creationId xmlns:a16="http://schemas.microsoft.com/office/drawing/2014/main" id="{CAFA687B-446D-B4DA-6C11-FE9D72BA69D5}"/>
               </a:ext>
             </a:extLst>
           </p:cNvPr>
@@ -11371,7 +10559,7 @@
           <p:cNvPr id="7" name="Rectángulo 6">
             <a:extLst>
               <a:ext uri="{FF2B5EF4-FFF2-40B4-BE49-F238E27FC236}">
-                <a16:creationId xmlns:a16="http://schemas.microsoft.com/office/drawing/2014/main" id="{A6CCE634-FF91-FD5F-7C1D-4329E9DA2469}"/>
+                <a16:creationId xmlns:a16="http://schemas.microsoft.com/office/drawing/2014/main" id="{59B9DD2D-204D-983B-2FB5-C82CF1D2745C}"/>
               </a:ext>
             </a:extLst>
           </p:cNvPr>
@@ -11680,7 +10868,7 @@
           <p:cNvPr id="9" name="CuadroTexto 8">
             <a:extLst>
               <a:ext uri="{FF2B5EF4-FFF2-40B4-BE49-F238E27FC236}">
-                <a16:creationId xmlns:a16="http://schemas.microsoft.com/office/drawing/2014/main" id="{EF71FD03-8141-88A1-69BA-49588EB48896}"/>
+                <a16:creationId xmlns:a16="http://schemas.microsoft.com/office/drawing/2014/main" id="{0C54884E-0CFF-2DDB-2E01-6A2CEA517847}"/>
               </a:ext>
             </a:extLst>
           </p:cNvPr>
@@ -11729,10 +10917,10 @@
       </p:sp>
       <p:pic>
         <p:nvPicPr>
-          <p:cNvPr id="16" name="Imagen 15">
+          <p:cNvPr id="8" name="Imagen 7">
             <a:extLst>
               <a:ext uri="{FF2B5EF4-FFF2-40B4-BE49-F238E27FC236}">
-                <a16:creationId xmlns:a16="http://schemas.microsoft.com/office/drawing/2014/main" id="{C4DFF30D-C077-10EF-14C3-025F8282E14B}"/>
+                <a16:creationId xmlns:a16="http://schemas.microsoft.com/office/drawing/2014/main" id="{A0AC8167-89D8-C79C-4A1B-2364C4C124DE}"/>
               </a:ext>
             </a:extLst>
           </p:cNvPr>
@@ -11749,8 +10937,8 @@
         </p:blipFill>
         <p:spPr>
           <a:xfrm>
-            <a:off x="869369" y="1550963"/>
-            <a:ext cx="5340057" cy="2992094"/>
+            <a:off x="954650" y="1625600"/>
+            <a:ext cx="5141350" cy="2738672"/>
           </a:xfrm>
           <a:prstGeom prst="rect">
             <a:avLst/>
@@ -11760,7 +10948,7 @@
     </p:spTree>
     <p:extLst>
       <p:ext uri="{BB962C8B-B14F-4D97-AF65-F5344CB8AC3E}">
-        <p14:creationId xmlns:p14="http://schemas.microsoft.com/office/powerpoint/2010/main" val="1475710608"/>
+        <p14:creationId xmlns:p14="http://schemas.microsoft.com/office/powerpoint/2010/main" val="3435094062"/>
       </p:ext>
     </p:extLst>
   </p:cSld>
@@ -11778,7 +10966,7 @@
         <p:cNvPr id="1" name="">
           <a:extLst>
             <a:ext uri="{FF2B5EF4-FFF2-40B4-BE49-F238E27FC236}">
-              <a16:creationId xmlns:a16="http://schemas.microsoft.com/office/drawing/2014/main" id="{F46902A0-B8CA-8FC3-5E6A-12E29B76C6E2}"/>
+              <a16:creationId xmlns:a16="http://schemas.microsoft.com/office/drawing/2014/main" id="{CFC2BAC6-3A43-7A3D-7267-92C5CD031833}"/>
             </a:ext>
           </a:extLst>
         </p:cNvPr>
@@ -11798,7 +10986,7 @@
           <p:cNvPr id="5" name="Marcador de pie de página 4">
             <a:extLst>
               <a:ext uri="{FF2B5EF4-FFF2-40B4-BE49-F238E27FC236}">
-                <a16:creationId xmlns:a16="http://schemas.microsoft.com/office/drawing/2014/main" id="{E004C20D-2351-9F85-E590-F512E9697724}"/>
+                <a16:creationId xmlns:a16="http://schemas.microsoft.com/office/drawing/2014/main" id="{3BCB7616-5A13-9CF0-676B-02BA55A52A3C}"/>
               </a:ext>
             </a:extLst>
           </p:cNvPr>
@@ -11826,7 +11014,7 @@
           <p:cNvPr id="6" name="Marcador de número de diapositiva 5">
             <a:extLst>
               <a:ext uri="{FF2B5EF4-FFF2-40B4-BE49-F238E27FC236}">
-                <a16:creationId xmlns:a16="http://schemas.microsoft.com/office/drawing/2014/main" id="{85C3E3EC-B8F9-68A2-9BFF-364711C8221D}"/>
+                <a16:creationId xmlns:a16="http://schemas.microsoft.com/office/drawing/2014/main" id="{318A4608-0616-6B75-BD2E-24CDB2EB5F70}"/>
               </a:ext>
             </a:extLst>
           </p:cNvPr>
@@ -11856,7 +11044,7 @@
           <p:cNvPr id="10" name="Gráfico 9">
             <a:extLst>
               <a:ext uri="{FF2B5EF4-FFF2-40B4-BE49-F238E27FC236}">
-                <a16:creationId xmlns:a16="http://schemas.microsoft.com/office/drawing/2014/main" id="{E603DA19-9034-2E88-AFAA-3111DAC19C7C}"/>
+                <a16:creationId xmlns:a16="http://schemas.microsoft.com/office/drawing/2014/main" id="{B36CF8ED-4BED-AD83-C2A7-22442A22EAA9}"/>
               </a:ext>
             </a:extLst>
           </p:cNvPr>
@@ -11892,7 +11080,7 @@
           <p:cNvPr id="13" name="object 16">
             <a:extLst>
               <a:ext uri="{FF2B5EF4-FFF2-40B4-BE49-F238E27FC236}">
-                <a16:creationId xmlns:a16="http://schemas.microsoft.com/office/drawing/2014/main" id="{0DDC95A3-1D4E-4161-9C21-7A30A1DB8177}"/>
+                <a16:creationId xmlns:a16="http://schemas.microsoft.com/office/drawing/2014/main" id="{D4E97894-F9DA-ACF5-41B2-C0833F853D73}"/>
               </a:ext>
             </a:extLst>
           </p:cNvPr>
@@ -11959,10 +11147,1114 @@
       </p:sp>
       <p:sp>
         <p:nvSpPr>
+          <p:cNvPr id="2" name="CuadroTexto 1">
+            <a:extLst>
+              <a:ext uri="{FF2B5EF4-FFF2-40B4-BE49-F238E27FC236}">
+                <a16:creationId xmlns:a16="http://schemas.microsoft.com/office/drawing/2014/main" id="{305169C8-1970-93CE-E3F4-060DE50AFFB7}"/>
+              </a:ext>
+            </a:extLst>
+          </p:cNvPr>
+          <p:cNvSpPr txBox="1"/>
+          <p:nvPr/>
+        </p:nvSpPr>
+        <p:spPr>
+          <a:xfrm>
+            <a:off x="609441" y="4860334"/>
+            <a:ext cx="11199971" cy="1569660"/>
+          </a:xfrm>
+          <a:prstGeom prst="rect">
+            <a:avLst/>
+          </a:prstGeom>
+          <a:solidFill>
+            <a:schemeClr val="bg1">
+              <a:lumMod val="95000"/>
+            </a:schemeClr>
+          </a:solidFill>
+          <a:ln w="28575">
+            <a:solidFill>
+              <a:srgbClr val="E0700D"/>
+            </a:solidFill>
+          </a:ln>
+        </p:spPr>
+        <p:txBody>
+          <a:bodyPr wrap="square" lIns="91440" tIns="45720" rIns="91440" bIns="45720" rtlCol="0" anchor="t">
+            <a:spAutoFit/>
+          </a:bodyPr>
+          <a:lstStyle/>
+          <a:p>
+            <a:pPr algn="just"/>
+            <a:r>
+              <a:rPr lang="en-US" sz="1200" dirty="0">
+                <a:latin typeface="Arial" panose="020B0604020202020204" pitchFamily="34" charset="0"/>
+                <a:cs typeface="Arial" panose="020B0604020202020204" pitchFamily="34" charset="0"/>
+              </a:rPr>
+              <a:t>Comment results: describe the transfer function, is there any interference pattern in case 1? Is there any interference pattern in case 2? Explain the difference between both cases. Compare the Extinction Ratio of both variations. </a:t>
+            </a:r>
+          </a:p>
+          <a:p>
+            <a:pPr algn="just"/>
+            <a:r>
+              <a:rPr lang="en-US" sz="1200" dirty="0">
+                <a:latin typeface="Arial" panose="020B0604020202020204" pitchFamily="34" charset="0"/>
+                <a:cs typeface="Arial" panose="020B0604020202020204" pitchFamily="34" charset="0"/>
+              </a:rPr>
+              <a:t>Extra: What coupling coefficient will you select for the input coupler if you want to match the losses of the longer arm? Simulate and extract the ER.</a:t>
+            </a:r>
+          </a:p>
+          <a:p>
+            <a:pPr algn="just"/>
+            <a:r>
+              <a:rPr lang="en-US" sz="1200" dirty="0">
+                <a:latin typeface="Arial" panose="020B0604020202020204" pitchFamily="34" charset="0"/>
+                <a:cs typeface="Arial" panose="020B0604020202020204" pitchFamily="34" charset="0"/>
+              </a:rPr>
+              <a:t>En </a:t>
+            </a:r>
+            <a:r>
+              <a:rPr lang="en-US" sz="1200" dirty="0" err="1">
+                <a:latin typeface="Arial" panose="020B0604020202020204" pitchFamily="34" charset="0"/>
+                <a:cs typeface="Arial" panose="020B0604020202020204" pitchFamily="34" charset="0"/>
+              </a:rPr>
+              <a:t>este</a:t>
+            </a:r>
+            <a:r>
+              <a:rPr lang="en-US" sz="1200" dirty="0">
+                <a:latin typeface="Arial" panose="020B0604020202020204" pitchFamily="34" charset="0"/>
+                <a:cs typeface="Arial" panose="020B0604020202020204" pitchFamily="34" charset="0"/>
+              </a:rPr>
+              <a:t> </a:t>
+            </a:r>
+            <a:r>
+              <a:rPr lang="en-US" sz="1200" dirty="0" err="1">
+                <a:latin typeface="Arial" panose="020B0604020202020204" pitchFamily="34" charset="0"/>
+                <a:cs typeface="Arial" panose="020B0604020202020204" pitchFamily="34" charset="0"/>
+              </a:rPr>
+              <a:t>caso</a:t>
+            </a:r>
+            <a:r>
+              <a:rPr lang="en-US" sz="1200" dirty="0">
+                <a:latin typeface="Arial" panose="020B0604020202020204" pitchFamily="34" charset="0"/>
+                <a:cs typeface="Arial" panose="020B0604020202020204" pitchFamily="34" charset="0"/>
+              </a:rPr>
+              <a:t>, la </a:t>
+            </a:r>
+            <a:r>
+              <a:rPr lang="en-US" sz="1200" dirty="0" err="1">
+                <a:latin typeface="Arial" panose="020B0604020202020204" pitchFamily="34" charset="0"/>
+                <a:cs typeface="Arial" panose="020B0604020202020204" pitchFamily="34" charset="0"/>
+              </a:rPr>
+              <a:t>función</a:t>
+            </a:r>
+            <a:r>
+              <a:rPr lang="en-US" sz="1200" dirty="0">
+                <a:latin typeface="Arial" panose="020B0604020202020204" pitchFamily="34" charset="0"/>
+                <a:cs typeface="Arial" panose="020B0604020202020204" pitchFamily="34" charset="0"/>
+              </a:rPr>
+              <a:t> </a:t>
+            </a:r>
+            <a:r>
+              <a:rPr lang="en-US" sz="1200" dirty="0" err="1">
+                <a:latin typeface="Arial" panose="020B0604020202020204" pitchFamily="34" charset="0"/>
+                <a:cs typeface="Arial" panose="020B0604020202020204" pitchFamily="34" charset="0"/>
+              </a:rPr>
+              <a:t>sigue</a:t>
+            </a:r>
+            <a:r>
+              <a:rPr lang="en-US" sz="1200" dirty="0">
+                <a:latin typeface="Arial" panose="020B0604020202020204" pitchFamily="34" charset="0"/>
+                <a:cs typeface="Arial" panose="020B0604020202020204" pitchFamily="34" charset="0"/>
+              </a:rPr>
+              <a:t> </a:t>
+            </a:r>
+            <a:r>
+              <a:rPr lang="en-US" sz="1200" dirty="0" err="1">
+                <a:latin typeface="Arial" panose="020B0604020202020204" pitchFamily="34" charset="0"/>
+                <a:cs typeface="Arial" panose="020B0604020202020204" pitchFamily="34" charset="0"/>
+              </a:rPr>
+              <a:t>siendo</a:t>
+            </a:r>
+            <a:r>
+              <a:rPr lang="en-US" sz="1200" dirty="0">
+                <a:latin typeface="Arial" panose="020B0604020202020204" pitchFamily="34" charset="0"/>
+                <a:cs typeface="Arial" panose="020B0604020202020204" pitchFamily="34" charset="0"/>
+              </a:rPr>
+              <a:t> </a:t>
+            </a:r>
+            <a:r>
+              <a:rPr lang="en-US" sz="1200" dirty="0" err="1">
+                <a:latin typeface="Arial" panose="020B0604020202020204" pitchFamily="34" charset="0"/>
+                <a:cs typeface="Arial" panose="020B0604020202020204" pitchFamily="34" charset="0"/>
+              </a:rPr>
+              <a:t>periódica</a:t>
+            </a:r>
+            <a:r>
+              <a:rPr lang="en-US" sz="1200" dirty="0">
+                <a:latin typeface="Arial" panose="020B0604020202020204" pitchFamily="34" charset="0"/>
+                <a:cs typeface="Arial" panose="020B0604020202020204" pitchFamily="34" charset="0"/>
+              </a:rPr>
+              <a:t> </a:t>
+            </a:r>
+            <a:r>
+              <a:rPr lang="en-US" sz="1200" dirty="0" err="1">
+                <a:latin typeface="Arial" panose="020B0604020202020204" pitchFamily="34" charset="0"/>
+                <a:cs typeface="Arial" panose="020B0604020202020204" pitchFamily="34" charset="0"/>
+              </a:rPr>
+              <a:t>pero</a:t>
+            </a:r>
+            <a:r>
+              <a:rPr lang="en-US" sz="1200" dirty="0">
+                <a:latin typeface="Arial" panose="020B0604020202020204" pitchFamily="34" charset="0"/>
+                <a:cs typeface="Arial" panose="020B0604020202020204" pitchFamily="34" charset="0"/>
+              </a:rPr>
+              <a:t> la </a:t>
+            </a:r>
+            <a:r>
+              <a:rPr lang="en-US" sz="1200" dirty="0" err="1">
+                <a:latin typeface="Arial" panose="020B0604020202020204" pitchFamily="34" charset="0"/>
+                <a:cs typeface="Arial" panose="020B0604020202020204" pitchFamily="34" charset="0"/>
+              </a:rPr>
+              <a:t>interferencia</a:t>
+            </a:r>
+            <a:r>
+              <a:rPr lang="en-US" sz="1200" dirty="0">
+                <a:latin typeface="Arial" panose="020B0604020202020204" pitchFamily="34" charset="0"/>
+                <a:cs typeface="Arial" panose="020B0604020202020204" pitchFamily="34" charset="0"/>
+              </a:rPr>
+              <a:t> es </a:t>
+            </a:r>
+            <a:r>
+              <a:rPr lang="en-US" sz="1200" dirty="0" err="1">
+                <a:latin typeface="Arial" panose="020B0604020202020204" pitchFamily="34" charset="0"/>
+                <a:cs typeface="Arial" panose="020B0604020202020204" pitchFamily="34" charset="0"/>
+              </a:rPr>
+              <a:t>más</a:t>
+            </a:r>
+            <a:r>
+              <a:rPr lang="en-US" sz="1200" dirty="0">
+                <a:latin typeface="Arial" panose="020B0604020202020204" pitchFamily="34" charset="0"/>
+                <a:cs typeface="Arial" panose="020B0604020202020204" pitchFamily="34" charset="0"/>
+              </a:rPr>
+              <a:t> </a:t>
+            </a:r>
+            <a:r>
+              <a:rPr lang="en-US" sz="1200" dirty="0" err="1">
+                <a:latin typeface="Arial" panose="020B0604020202020204" pitchFamily="34" charset="0"/>
+                <a:cs typeface="Arial" panose="020B0604020202020204" pitchFamily="34" charset="0"/>
+              </a:rPr>
+              <a:t>débil</a:t>
+            </a:r>
+            <a:r>
+              <a:rPr lang="en-US" sz="1200" dirty="0">
+                <a:latin typeface="Arial" panose="020B0604020202020204" pitchFamily="34" charset="0"/>
+                <a:cs typeface="Arial" panose="020B0604020202020204" pitchFamily="34" charset="0"/>
+              </a:rPr>
+              <a:t> (ER = 0.42dB). </a:t>
+            </a:r>
+            <a:r>
+              <a:rPr lang="en-US" sz="1200" dirty="0" err="1">
+                <a:latin typeface="Arial" panose="020B0604020202020204" pitchFamily="34" charset="0"/>
+                <a:cs typeface="Arial" panose="020B0604020202020204" pitchFamily="34" charset="0"/>
+              </a:rPr>
+              <a:t>Aunque</a:t>
+            </a:r>
+            <a:r>
+              <a:rPr lang="en-US" sz="1200" dirty="0">
+                <a:latin typeface="Arial" panose="020B0604020202020204" pitchFamily="34" charset="0"/>
+                <a:cs typeface="Arial" panose="020B0604020202020204" pitchFamily="34" charset="0"/>
+              </a:rPr>
+              <a:t> </a:t>
+            </a:r>
+            <a:r>
+              <a:rPr lang="en-US" sz="1200" dirty="0" err="1">
+                <a:latin typeface="Arial" panose="020B0604020202020204" pitchFamily="34" charset="0"/>
+                <a:cs typeface="Arial" panose="020B0604020202020204" pitchFamily="34" charset="0"/>
+              </a:rPr>
+              <a:t>el</a:t>
+            </a:r>
+            <a:r>
+              <a:rPr lang="en-US" sz="1200" dirty="0">
+                <a:latin typeface="Arial" panose="020B0604020202020204" pitchFamily="34" charset="0"/>
+                <a:cs typeface="Arial" panose="020B0604020202020204" pitchFamily="34" charset="0"/>
+              </a:rPr>
+              <a:t> </a:t>
+            </a:r>
+            <a:r>
+              <a:rPr lang="en-US" sz="1200" dirty="0" err="1">
+                <a:latin typeface="Arial" panose="020B0604020202020204" pitchFamily="34" charset="0"/>
+                <a:cs typeface="Arial" panose="020B0604020202020204" pitchFamily="34" charset="0"/>
+              </a:rPr>
+              <a:t>nivel</a:t>
+            </a:r>
+            <a:r>
+              <a:rPr lang="en-US" sz="1200" dirty="0">
+                <a:latin typeface="Arial" panose="020B0604020202020204" pitchFamily="34" charset="0"/>
+                <a:cs typeface="Arial" panose="020B0604020202020204" pitchFamily="34" charset="0"/>
+              </a:rPr>
+              <a:t> de </a:t>
+            </a:r>
+            <a:r>
+              <a:rPr lang="en-US" sz="1200" dirty="0" err="1">
+                <a:latin typeface="Arial" panose="020B0604020202020204" pitchFamily="34" charset="0"/>
+                <a:cs typeface="Arial" panose="020B0604020202020204" pitchFamily="34" charset="0"/>
+              </a:rPr>
+              <a:t>potencia</a:t>
+            </a:r>
+            <a:r>
+              <a:rPr lang="en-US" sz="1200" dirty="0">
+                <a:latin typeface="Arial" panose="020B0604020202020204" pitchFamily="34" charset="0"/>
+                <a:cs typeface="Arial" panose="020B0604020202020204" pitchFamily="34" charset="0"/>
+              </a:rPr>
+              <a:t> </a:t>
+            </a:r>
+            <a:r>
+              <a:rPr lang="en-US" sz="1200" dirty="0" err="1">
+                <a:latin typeface="Arial" panose="020B0604020202020204" pitchFamily="34" charset="0"/>
+                <a:cs typeface="Arial" panose="020B0604020202020204" pitchFamily="34" charset="0"/>
+              </a:rPr>
+              <a:t>sube</a:t>
+            </a:r>
+            <a:r>
+              <a:rPr lang="en-US" sz="1200" dirty="0">
+                <a:latin typeface="Arial" panose="020B0604020202020204" pitchFamily="34" charset="0"/>
+                <a:cs typeface="Arial" panose="020B0604020202020204" pitchFamily="34" charset="0"/>
+              </a:rPr>
+              <a:t> </a:t>
+            </a:r>
+            <a:r>
+              <a:rPr lang="en-US" sz="1200" dirty="0" err="1">
+                <a:latin typeface="Arial" panose="020B0604020202020204" pitchFamily="34" charset="0"/>
+                <a:cs typeface="Arial" panose="020B0604020202020204" pitchFamily="34" charset="0"/>
+              </a:rPr>
+              <a:t>porque</a:t>
+            </a:r>
+            <a:r>
+              <a:rPr lang="en-US" sz="1200" dirty="0">
+                <a:latin typeface="Arial" panose="020B0604020202020204" pitchFamily="34" charset="0"/>
+                <a:cs typeface="Arial" panose="020B0604020202020204" pitchFamily="34" charset="0"/>
+              </a:rPr>
+              <a:t> se </a:t>
+            </a:r>
+            <a:r>
+              <a:rPr lang="en-US" sz="1200" dirty="0" err="1">
+                <a:latin typeface="Arial" panose="020B0604020202020204" pitchFamily="34" charset="0"/>
+                <a:cs typeface="Arial" panose="020B0604020202020204" pitchFamily="34" charset="0"/>
+              </a:rPr>
+              <a:t>transmite</a:t>
+            </a:r>
+            <a:r>
+              <a:rPr lang="en-US" sz="1200" dirty="0">
+                <a:latin typeface="Arial" panose="020B0604020202020204" pitchFamily="34" charset="0"/>
+                <a:cs typeface="Arial" panose="020B0604020202020204" pitchFamily="34" charset="0"/>
+              </a:rPr>
+              <a:t> </a:t>
+            </a:r>
+            <a:r>
+              <a:rPr lang="en-US" sz="1200" dirty="0" err="1">
+                <a:latin typeface="Arial" panose="020B0604020202020204" pitchFamily="34" charset="0"/>
+                <a:cs typeface="Arial" panose="020B0604020202020204" pitchFamily="34" charset="0"/>
+              </a:rPr>
+              <a:t>más</a:t>
+            </a:r>
+            <a:r>
+              <a:rPr lang="en-US" sz="1200" dirty="0">
+                <a:latin typeface="Arial" panose="020B0604020202020204" pitchFamily="34" charset="0"/>
+                <a:cs typeface="Arial" panose="020B0604020202020204" pitchFamily="34" charset="0"/>
+              </a:rPr>
+              <a:t> </a:t>
+            </a:r>
+            <a:r>
+              <a:rPr lang="en-US" sz="1200" dirty="0" err="1">
+                <a:latin typeface="Arial" panose="020B0604020202020204" pitchFamily="34" charset="0"/>
+                <a:cs typeface="Arial" panose="020B0604020202020204" pitchFamily="34" charset="0"/>
+              </a:rPr>
+              <a:t>potencia</a:t>
+            </a:r>
+            <a:r>
+              <a:rPr lang="en-US" sz="1200" dirty="0">
+                <a:latin typeface="Arial" panose="020B0604020202020204" pitchFamily="34" charset="0"/>
+                <a:cs typeface="Arial" panose="020B0604020202020204" pitchFamily="34" charset="0"/>
+              </a:rPr>
+              <a:t> </a:t>
+            </a:r>
+            <a:r>
+              <a:rPr lang="en-US" sz="1200" dirty="0" err="1">
+                <a:latin typeface="Arial" panose="020B0604020202020204" pitchFamily="34" charset="0"/>
+                <a:cs typeface="Arial" panose="020B0604020202020204" pitchFamily="34" charset="0"/>
+              </a:rPr>
+              <a:t>por</a:t>
+            </a:r>
+            <a:r>
+              <a:rPr lang="en-US" sz="1200" dirty="0">
+                <a:latin typeface="Arial" panose="020B0604020202020204" pitchFamily="34" charset="0"/>
+                <a:cs typeface="Arial" panose="020B0604020202020204" pitchFamily="34" charset="0"/>
+              </a:rPr>
+              <a:t> </a:t>
+            </a:r>
+            <a:r>
+              <a:rPr lang="en-US" sz="1200" dirty="0" err="1">
+                <a:latin typeface="Arial" panose="020B0604020202020204" pitchFamily="34" charset="0"/>
+                <a:cs typeface="Arial" panose="020B0604020202020204" pitchFamily="34" charset="0"/>
+              </a:rPr>
+              <a:t>el</a:t>
+            </a:r>
+            <a:r>
+              <a:rPr lang="en-US" sz="1200" dirty="0">
+                <a:latin typeface="Arial" panose="020B0604020202020204" pitchFamily="34" charset="0"/>
+                <a:cs typeface="Arial" panose="020B0604020202020204" pitchFamily="34" charset="0"/>
+              </a:rPr>
+              <a:t> </a:t>
+            </a:r>
+            <a:r>
+              <a:rPr lang="en-US" sz="1200" dirty="0" err="1">
+                <a:latin typeface="Arial" panose="020B0604020202020204" pitchFamily="34" charset="0"/>
+                <a:cs typeface="Arial" panose="020B0604020202020204" pitchFamily="34" charset="0"/>
+              </a:rPr>
+              <a:t>brazo</a:t>
+            </a:r>
+            <a:r>
+              <a:rPr lang="en-US" sz="1200" dirty="0">
+                <a:latin typeface="Arial" panose="020B0604020202020204" pitchFamily="34" charset="0"/>
+                <a:cs typeface="Arial" panose="020B0604020202020204" pitchFamily="34" charset="0"/>
+              </a:rPr>
+              <a:t> con </a:t>
+            </a:r>
+            <a:r>
+              <a:rPr lang="en-US" sz="1200" dirty="0" err="1">
+                <a:latin typeface="Arial" panose="020B0604020202020204" pitchFamily="34" charset="0"/>
+                <a:cs typeface="Arial" panose="020B0604020202020204" pitchFamily="34" charset="0"/>
+              </a:rPr>
+              <a:t>menos</a:t>
+            </a:r>
+            <a:r>
+              <a:rPr lang="en-US" sz="1200" dirty="0">
+                <a:latin typeface="Arial" panose="020B0604020202020204" pitchFamily="34" charset="0"/>
+                <a:cs typeface="Arial" panose="020B0604020202020204" pitchFamily="34" charset="0"/>
+              </a:rPr>
+              <a:t> </a:t>
+            </a:r>
+            <a:r>
+              <a:rPr lang="en-US" sz="1200" dirty="0" err="1">
+                <a:latin typeface="Arial" panose="020B0604020202020204" pitchFamily="34" charset="0"/>
+                <a:cs typeface="Arial" panose="020B0604020202020204" pitchFamily="34" charset="0"/>
+              </a:rPr>
+              <a:t>pérdidas</a:t>
+            </a:r>
+            <a:r>
+              <a:rPr lang="en-US" sz="1200" dirty="0">
+                <a:latin typeface="Arial" panose="020B0604020202020204" pitchFamily="34" charset="0"/>
+                <a:cs typeface="Arial" panose="020B0604020202020204" pitchFamily="34" charset="0"/>
+              </a:rPr>
+              <a:t>, </a:t>
+            </a:r>
+            <a:r>
+              <a:rPr lang="en-US" sz="1200" dirty="0" err="1">
+                <a:latin typeface="Arial" panose="020B0604020202020204" pitchFamily="34" charset="0"/>
+                <a:cs typeface="Arial" panose="020B0604020202020204" pitchFamily="34" charset="0"/>
+              </a:rPr>
+              <a:t>el</a:t>
+            </a:r>
+            <a:r>
+              <a:rPr lang="en-US" sz="1200" dirty="0">
+                <a:latin typeface="Arial" panose="020B0604020202020204" pitchFamily="34" charset="0"/>
+                <a:cs typeface="Arial" panose="020B0604020202020204" pitchFamily="34" charset="0"/>
+              </a:rPr>
+              <a:t> </a:t>
+            </a:r>
+            <a:r>
+              <a:rPr lang="en-US" sz="1200" dirty="0" err="1">
+                <a:latin typeface="Arial" panose="020B0604020202020204" pitchFamily="34" charset="0"/>
+                <a:cs typeface="Arial" panose="020B0604020202020204" pitchFamily="34" charset="0"/>
+              </a:rPr>
+              <a:t>desbalance</a:t>
+            </a:r>
+            <a:r>
+              <a:rPr lang="en-US" sz="1200" dirty="0">
+                <a:latin typeface="Arial" panose="020B0604020202020204" pitchFamily="34" charset="0"/>
+                <a:cs typeface="Arial" panose="020B0604020202020204" pitchFamily="34" charset="0"/>
+              </a:rPr>
+              <a:t> entre la </a:t>
+            </a:r>
+            <a:r>
+              <a:rPr lang="en-US" sz="1200" dirty="0" err="1">
+                <a:latin typeface="Arial" panose="020B0604020202020204" pitchFamily="34" charset="0"/>
+                <a:cs typeface="Arial" panose="020B0604020202020204" pitchFamily="34" charset="0"/>
+              </a:rPr>
+              <a:t>potencia</a:t>
+            </a:r>
+            <a:r>
+              <a:rPr lang="en-US" sz="1200" dirty="0">
+                <a:latin typeface="Arial" panose="020B0604020202020204" pitchFamily="34" charset="0"/>
+                <a:cs typeface="Arial" panose="020B0604020202020204" pitchFamily="34" charset="0"/>
+              </a:rPr>
+              <a:t> de ambos </a:t>
+            </a:r>
+            <a:r>
+              <a:rPr lang="en-US" sz="1200" dirty="0" err="1">
+                <a:latin typeface="Arial" panose="020B0604020202020204" pitchFamily="34" charset="0"/>
+                <a:cs typeface="Arial" panose="020B0604020202020204" pitchFamily="34" charset="0"/>
+              </a:rPr>
+              <a:t>brazos</a:t>
+            </a:r>
+            <a:r>
+              <a:rPr lang="en-US" sz="1200" dirty="0">
+                <a:latin typeface="Arial" panose="020B0604020202020204" pitchFamily="34" charset="0"/>
+                <a:cs typeface="Arial" panose="020B0604020202020204" pitchFamily="34" charset="0"/>
+              </a:rPr>
+              <a:t> no es comparable y la </a:t>
+            </a:r>
+            <a:r>
+              <a:rPr lang="en-US" sz="1200" dirty="0" err="1">
+                <a:latin typeface="Arial" panose="020B0604020202020204" pitchFamily="34" charset="0"/>
+                <a:cs typeface="Arial" panose="020B0604020202020204" pitchFamily="34" charset="0"/>
+              </a:rPr>
+              <a:t>interferencia</a:t>
+            </a:r>
+            <a:r>
+              <a:rPr lang="en-US" sz="1200" dirty="0">
+                <a:latin typeface="Arial" panose="020B0604020202020204" pitchFamily="34" charset="0"/>
+                <a:cs typeface="Arial" panose="020B0604020202020204" pitchFamily="34" charset="0"/>
+              </a:rPr>
+              <a:t> </a:t>
+            </a:r>
+            <a:r>
+              <a:rPr lang="en-US" sz="1200" dirty="0" err="1">
+                <a:latin typeface="Arial" panose="020B0604020202020204" pitchFamily="34" charset="0"/>
+                <a:cs typeface="Arial" panose="020B0604020202020204" pitchFamily="34" charset="0"/>
+              </a:rPr>
+              <a:t>casi</a:t>
+            </a:r>
+            <a:r>
+              <a:rPr lang="en-US" sz="1200" dirty="0">
+                <a:latin typeface="Arial" panose="020B0604020202020204" pitchFamily="34" charset="0"/>
+                <a:cs typeface="Arial" panose="020B0604020202020204" pitchFamily="34" charset="0"/>
+              </a:rPr>
+              <a:t> </a:t>
+            </a:r>
+            <a:r>
+              <a:rPr lang="en-US" sz="1200" dirty="0" err="1">
+                <a:latin typeface="Arial" panose="020B0604020202020204" pitchFamily="34" charset="0"/>
+                <a:cs typeface="Arial" panose="020B0604020202020204" pitchFamily="34" charset="0"/>
+              </a:rPr>
+              <a:t>desaparece</a:t>
+            </a:r>
+            <a:r>
+              <a:rPr lang="en-US" sz="1200" dirty="0">
+                <a:latin typeface="Arial" panose="020B0604020202020204" pitchFamily="34" charset="0"/>
+                <a:cs typeface="Arial" panose="020B0604020202020204" pitchFamily="34" charset="0"/>
+              </a:rPr>
+              <a:t>. Para </a:t>
+            </a:r>
+            <a:r>
+              <a:rPr lang="en-US" sz="1200" dirty="0" err="1">
+                <a:latin typeface="Arial" panose="020B0604020202020204" pitchFamily="34" charset="0"/>
+                <a:cs typeface="Arial" panose="020B0604020202020204" pitchFamily="34" charset="0"/>
+              </a:rPr>
+              <a:t>poder</a:t>
+            </a:r>
+            <a:r>
+              <a:rPr lang="en-US" sz="1200" dirty="0">
+                <a:latin typeface="Arial" panose="020B0604020202020204" pitchFamily="34" charset="0"/>
+                <a:cs typeface="Arial" panose="020B0604020202020204" pitchFamily="34" charset="0"/>
+              </a:rPr>
+              <a:t> </a:t>
+            </a:r>
+            <a:r>
+              <a:rPr lang="en-US" sz="1200" dirty="0" err="1">
+                <a:latin typeface="Arial" panose="020B0604020202020204" pitchFamily="34" charset="0"/>
+                <a:cs typeface="Arial" panose="020B0604020202020204" pitchFamily="34" charset="0"/>
+              </a:rPr>
+              <a:t>compensar</a:t>
+            </a:r>
+            <a:r>
+              <a:rPr lang="en-US" sz="1200" dirty="0">
+                <a:latin typeface="Arial" panose="020B0604020202020204" pitchFamily="34" charset="0"/>
+                <a:cs typeface="Arial" panose="020B0604020202020204" pitchFamily="34" charset="0"/>
+              </a:rPr>
+              <a:t> las </a:t>
+            </a:r>
+            <a:r>
+              <a:rPr lang="en-US" sz="1200" dirty="0" err="1">
+                <a:latin typeface="Arial" panose="020B0604020202020204" pitchFamily="34" charset="0"/>
+                <a:cs typeface="Arial" panose="020B0604020202020204" pitchFamily="34" charset="0"/>
+              </a:rPr>
+              <a:t>pérdidas</a:t>
+            </a:r>
+            <a:r>
+              <a:rPr lang="en-US" sz="1200" dirty="0">
+                <a:latin typeface="Arial" panose="020B0604020202020204" pitchFamily="34" charset="0"/>
+                <a:cs typeface="Arial" panose="020B0604020202020204" pitchFamily="34" charset="0"/>
+              </a:rPr>
+              <a:t> del </a:t>
+            </a:r>
+            <a:r>
+              <a:rPr lang="en-US" sz="1200" dirty="0" err="1">
+                <a:latin typeface="Arial" panose="020B0604020202020204" pitchFamily="34" charset="0"/>
+                <a:cs typeface="Arial" panose="020B0604020202020204" pitchFamily="34" charset="0"/>
+              </a:rPr>
+              <a:t>brazo</a:t>
+            </a:r>
+            <a:r>
+              <a:rPr lang="en-US" sz="1200" dirty="0">
+                <a:latin typeface="Arial" panose="020B0604020202020204" pitchFamily="34" charset="0"/>
+                <a:cs typeface="Arial" panose="020B0604020202020204" pitchFamily="34" charset="0"/>
+              </a:rPr>
+              <a:t> </a:t>
+            </a:r>
+            <a:r>
+              <a:rPr lang="en-US" sz="1200" dirty="0" err="1">
+                <a:latin typeface="Arial" panose="020B0604020202020204" pitchFamily="34" charset="0"/>
+                <a:cs typeface="Arial" panose="020B0604020202020204" pitchFamily="34" charset="0"/>
+              </a:rPr>
+              <a:t>más</a:t>
+            </a:r>
+            <a:r>
+              <a:rPr lang="en-US" sz="1200" dirty="0">
+                <a:latin typeface="Arial" panose="020B0604020202020204" pitchFamily="34" charset="0"/>
+                <a:cs typeface="Arial" panose="020B0604020202020204" pitchFamily="34" charset="0"/>
+              </a:rPr>
+              <a:t> largo, hay </a:t>
+            </a:r>
+            <a:r>
+              <a:rPr lang="en-US" sz="1200" dirty="0" err="1">
+                <a:latin typeface="Arial" panose="020B0604020202020204" pitchFamily="34" charset="0"/>
+                <a:cs typeface="Arial" panose="020B0604020202020204" pitchFamily="34" charset="0"/>
+              </a:rPr>
+              <a:t>que</a:t>
+            </a:r>
+            <a:r>
+              <a:rPr lang="en-US" sz="1200" dirty="0">
+                <a:latin typeface="Arial" panose="020B0604020202020204" pitchFamily="34" charset="0"/>
+                <a:cs typeface="Arial" panose="020B0604020202020204" pitchFamily="34" charset="0"/>
+              </a:rPr>
+              <a:t> mandar </a:t>
+            </a:r>
+            <a:r>
+              <a:rPr lang="en-US" sz="1200" dirty="0" err="1">
+                <a:latin typeface="Arial" panose="020B0604020202020204" pitchFamily="34" charset="0"/>
+                <a:cs typeface="Arial" panose="020B0604020202020204" pitchFamily="34" charset="0"/>
+              </a:rPr>
+              <a:t>más</a:t>
+            </a:r>
+            <a:r>
+              <a:rPr lang="en-US" sz="1200" dirty="0">
+                <a:latin typeface="Arial" panose="020B0604020202020204" pitchFamily="34" charset="0"/>
+                <a:cs typeface="Arial" panose="020B0604020202020204" pitchFamily="34" charset="0"/>
+              </a:rPr>
+              <a:t> </a:t>
+            </a:r>
+            <a:r>
+              <a:rPr lang="en-US" sz="1200" dirty="0" err="1">
+                <a:latin typeface="Arial" panose="020B0604020202020204" pitchFamily="34" charset="0"/>
+                <a:cs typeface="Arial" panose="020B0604020202020204" pitchFamily="34" charset="0"/>
+              </a:rPr>
+              <a:t>potencia</a:t>
+            </a:r>
+            <a:r>
+              <a:rPr lang="en-US" sz="1200" dirty="0">
+                <a:latin typeface="Arial" panose="020B0604020202020204" pitchFamily="34" charset="0"/>
+                <a:cs typeface="Arial" panose="020B0604020202020204" pitchFamily="34" charset="0"/>
+              </a:rPr>
+              <a:t> a </a:t>
+            </a:r>
+            <a:r>
+              <a:rPr lang="en-US" sz="1200" dirty="0" err="1">
+                <a:latin typeface="Arial" panose="020B0604020202020204" pitchFamily="34" charset="0"/>
+                <a:cs typeface="Arial" panose="020B0604020202020204" pitchFamily="34" charset="0"/>
+              </a:rPr>
+              <a:t>dicho</a:t>
+            </a:r>
+            <a:r>
+              <a:rPr lang="en-US" sz="1200" dirty="0">
+                <a:latin typeface="Arial" panose="020B0604020202020204" pitchFamily="34" charset="0"/>
+                <a:cs typeface="Arial" panose="020B0604020202020204" pitchFamily="34" charset="0"/>
+              </a:rPr>
+              <a:t> </a:t>
+            </a:r>
+            <a:r>
+              <a:rPr lang="en-US" sz="1200" dirty="0" err="1">
+                <a:latin typeface="Arial" panose="020B0604020202020204" pitchFamily="34" charset="0"/>
+                <a:cs typeface="Arial" panose="020B0604020202020204" pitchFamily="34" charset="0"/>
+              </a:rPr>
+              <a:t>brazo</a:t>
+            </a:r>
+            <a:r>
+              <a:rPr lang="en-US" sz="1200" dirty="0">
+                <a:latin typeface="Arial" panose="020B0604020202020204" pitchFamily="34" charset="0"/>
+                <a:cs typeface="Arial" panose="020B0604020202020204" pitchFamily="34" charset="0"/>
+              </a:rPr>
+              <a:t>. En </a:t>
+            </a:r>
+            <a:r>
+              <a:rPr lang="en-US" sz="1200" dirty="0" err="1">
+                <a:latin typeface="Arial" panose="020B0604020202020204" pitchFamily="34" charset="0"/>
+                <a:cs typeface="Arial" panose="020B0604020202020204" pitchFamily="34" charset="0"/>
+              </a:rPr>
+              <a:t>este</a:t>
+            </a:r>
+            <a:r>
+              <a:rPr lang="en-US" sz="1200" dirty="0">
+                <a:latin typeface="Arial" panose="020B0604020202020204" pitchFamily="34" charset="0"/>
+                <a:cs typeface="Arial" panose="020B0604020202020204" pitchFamily="34" charset="0"/>
+              </a:rPr>
+              <a:t> </a:t>
+            </a:r>
+            <a:r>
+              <a:rPr lang="en-US" sz="1200" dirty="0" err="1">
+                <a:latin typeface="Arial" panose="020B0604020202020204" pitchFamily="34" charset="0"/>
+                <a:cs typeface="Arial" panose="020B0604020202020204" pitchFamily="34" charset="0"/>
+              </a:rPr>
+              <a:t>caso</a:t>
+            </a:r>
+            <a:r>
+              <a:rPr lang="en-US" sz="1200" dirty="0">
+                <a:latin typeface="Arial" panose="020B0604020202020204" pitchFamily="34" charset="0"/>
+                <a:cs typeface="Arial" panose="020B0604020202020204" pitchFamily="34" charset="0"/>
+              </a:rPr>
+              <a:t> </a:t>
+            </a:r>
+            <a:r>
+              <a:rPr lang="en-US" sz="1200" dirty="0" err="1">
+                <a:latin typeface="Arial" panose="020B0604020202020204" pitchFamily="34" charset="0"/>
+                <a:cs typeface="Arial" panose="020B0604020202020204" pitchFamily="34" charset="0"/>
+              </a:rPr>
+              <a:t>muy</a:t>
+            </a:r>
+            <a:r>
+              <a:rPr lang="en-US" sz="1200" dirty="0">
+                <a:latin typeface="Arial" panose="020B0604020202020204" pitchFamily="34" charset="0"/>
+                <a:cs typeface="Arial" panose="020B0604020202020204" pitchFamily="34" charset="0"/>
+              </a:rPr>
+              <a:t> extremo, para </a:t>
+            </a:r>
+            <a:r>
+              <a:rPr lang="en-US" sz="1200" dirty="0" err="1">
+                <a:latin typeface="Arial" panose="020B0604020202020204" pitchFamily="34" charset="0"/>
+                <a:cs typeface="Arial" panose="020B0604020202020204" pitchFamily="34" charset="0"/>
+              </a:rPr>
+              <a:t>compensar</a:t>
+            </a:r>
+            <a:r>
+              <a:rPr lang="en-US" sz="1200" dirty="0">
+                <a:latin typeface="Arial" panose="020B0604020202020204" pitchFamily="34" charset="0"/>
+                <a:cs typeface="Arial" panose="020B0604020202020204" pitchFamily="34" charset="0"/>
+              </a:rPr>
+              <a:t> </a:t>
+            </a:r>
+            <a:r>
+              <a:rPr lang="en-US" sz="1200" dirty="0" err="1">
+                <a:latin typeface="Arial" panose="020B0604020202020204" pitchFamily="34" charset="0"/>
+                <a:cs typeface="Arial" panose="020B0604020202020204" pitchFamily="34" charset="0"/>
+              </a:rPr>
+              <a:t>unas</a:t>
+            </a:r>
+            <a:r>
+              <a:rPr lang="en-US" sz="1200" dirty="0">
+                <a:latin typeface="Arial" panose="020B0604020202020204" pitchFamily="34" charset="0"/>
+                <a:cs typeface="Arial" panose="020B0604020202020204" pitchFamily="34" charset="0"/>
+              </a:rPr>
+              <a:t> </a:t>
+            </a:r>
+            <a:r>
+              <a:rPr lang="en-US" sz="1200" dirty="0" err="1">
+                <a:latin typeface="Arial" panose="020B0604020202020204" pitchFamily="34" charset="0"/>
+                <a:cs typeface="Arial" panose="020B0604020202020204" pitchFamily="34" charset="0"/>
+              </a:rPr>
+              <a:t>pérdidas</a:t>
+            </a:r>
+            <a:r>
+              <a:rPr lang="en-US" sz="1200" dirty="0">
+                <a:latin typeface="Arial" panose="020B0604020202020204" pitchFamily="34" charset="0"/>
+                <a:cs typeface="Arial" panose="020B0604020202020204" pitchFamily="34" charset="0"/>
+              </a:rPr>
+              <a:t> de </a:t>
+            </a:r>
+            <a:r>
+              <a:rPr lang="en-US" sz="1200" dirty="0" err="1">
+                <a:latin typeface="Arial" panose="020B0604020202020204" pitchFamily="34" charset="0"/>
+                <a:cs typeface="Arial" panose="020B0604020202020204" pitchFamily="34" charset="0"/>
+              </a:rPr>
+              <a:t>unos</a:t>
+            </a:r>
+            <a:r>
+              <a:rPr lang="en-US" sz="1200" dirty="0">
+                <a:latin typeface="Arial" panose="020B0604020202020204" pitchFamily="34" charset="0"/>
+                <a:cs typeface="Arial" panose="020B0604020202020204" pitchFamily="34" charset="0"/>
+              </a:rPr>
+              <a:t> 22db, </a:t>
+            </a:r>
+            <a:r>
+              <a:rPr lang="en-US" sz="1200" dirty="0" err="1">
+                <a:latin typeface="Arial" panose="020B0604020202020204" pitchFamily="34" charset="0"/>
+                <a:cs typeface="Arial" panose="020B0604020202020204" pitchFamily="34" charset="0"/>
+              </a:rPr>
+              <a:t>habría</a:t>
+            </a:r>
+            <a:r>
+              <a:rPr lang="en-US" sz="1200" dirty="0">
+                <a:latin typeface="Arial" panose="020B0604020202020204" pitchFamily="34" charset="0"/>
+                <a:cs typeface="Arial" panose="020B0604020202020204" pitchFamily="34" charset="0"/>
+              </a:rPr>
+              <a:t> </a:t>
+            </a:r>
+            <a:r>
+              <a:rPr lang="en-US" sz="1200" dirty="0" err="1">
+                <a:latin typeface="Arial" panose="020B0604020202020204" pitchFamily="34" charset="0"/>
+                <a:cs typeface="Arial" panose="020B0604020202020204" pitchFamily="34" charset="0"/>
+              </a:rPr>
+              <a:t>que</a:t>
+            </a:r>
+            <a:r>
+              <a:rPr lang="en-US" sz="1200" dirty="0">
+                <a:latin typeface="Arial" panose="020B0604020202020204" pitchFamily="34" charset="0"/>
+                <a:cs typeface="Arial" panose="020B0604020202020204" pitchFamily="34" charset="0"/>
+              </a:rPr>
+              <a:t> meter </a:t>
+            </a:r>
+            <a:r>
+              <a:rPr lang="en-US" sz="1200" dirty="0" err="1">
+                <a:latin typeface="Arial" panose="020B0604020202020204" pitchFamily="34" charset="0"/>
+                <a:cs typeface="Arial" panose="020B0604020202020204" pitchFamily="34" charset="0"/>
+              </a:rPr>
+              <a:t>mucha</a:t>
+            </a:r>
+            <a:r>
+              <a:rPr lang="en-US" sz="1200" dirty="0">
+                <a:latin typeface="Arial" panose="020B0604020202020204" pitchFamily="34" charset="0"/>
+                <a:cs typeface="Arial" panose="020B0604020202020204" pitchFamily="34" charset="0"/>
+              </a:rPr>
+              <a:t> </a:t>
+            </a:r>
+            <a:r>
+              <a:rPr lang="en-US" sz="1200" dirty="0" err="1">
+                <a:latin typeface="Arial" panose="020B0604020202020204" pitchFamily="34" charset="0"/>
+                <a:cs typeface="Arial" panose="020B0604020202020204" pitchFamily="34" charset="0"/>
+              </a:rPr>
+              <a:t>potencia</a:t>
+            </a:r>
+            <a:r>
+              <a:rPr lang="en-US" sz="1200" dirty="0">
+                <a:latin typeface="Arial" panose="020B0604020202020204" pitchFamily="34" charset="0"/>
+                <a:cs typeface="Arial" panose="020B0604020202020204" pitchFamily="34" charset="0"/>
+              </a:rPr>
+              <a:t> </a:t>
+            </a:r>
+            <a:r>
+              <a:rPr lang="en-US" sz="1200" dirty="0" err="1">
+                <a:latin typeface="Arial" panose="020B0604020202020204" pitchFamily="34" charset="0"/>
+                <a:cs typeface="Arial" panose="020B0604020202020204" pitchFamily="34" charset="0"/>
+              </a:rPr>
+              <a:t>por</a:t>
+            </a:r>
+            <a:r>
+              <a:rPr lang="en-US" sz="1200" dirty="0">
+                <a:latin typeface="Arial" panose="020B0604020202020204" pitchFamily="34" charset="0"/>
+                <a:cs typeface="Arial" panose="020B0604020202020204" pitchFamily="34" charset="0"/>
+              </a:rPr>
+              <a:t> ese </a:t>
+            </a:r>
+            <a:r>
+              <a:rPr lang="en-US" sz="1200" dirty="0" err="1">
+                <a:latin typeface="Arial" panose="020B0604020202020204" pitchFamily="34" charset="0"/>
+                <a:cs typeface="Arial" panose="020B0604020202020204" pitchFamily="34" charset="0"/>
+              </a:rPr>
+              <a:t>brazo</a:t>
+            </a:r>
+            <a:r>
+              <a:rPr lang="en-US" sz="1200" dirty="0">
+                <a:latin typeface="Arial" panose="020B0604020202020204" pitchFamily="34" charset="0"/>
+                <a:cs typeface="Arial" panose="020B0604020202020204" pitchFamily="34" charset="0"/>
+              </a:rPr>
+              <a:t>: </a:t>
+            </a:r>
+            <a:r>
+              <a:rPr lang="en-US" sz="1200" dirty="0" err="1">
+                <a:latin typeface="Arial" panose="020B0604020202020204" pitchFamily="34" charset="0"/>
+                <a:cs typeface="Arial" panose="020B0604020202020204" pitchFamily="34" charset="0"/>
+              </a:rPr>
+              <a:t>simulando</a:t>
+            </a:r>
+            <a:r>
+              <a:rPr lang="en-US" sz="1200" dirty="0">
+                <a:latin typeface="Arial" panose="020B0604020202020204" pitchFamily="34" charset="0"/>
+                <a:cs typeface="Arial" panose="020B0604020202020204" pitchFamily="34" charset="0"/>
+              </a:rPr>
+              <a:t> para </a:t>
+            </a:r>
+            <a:r>
+              <a:rPr lang="en-US" sz="1200" dirty="0" err="1">
+                <a:latin typeface="Arial" panose="020B0604020202020204" pitchFamily="34" charset="0"/>
+                <a:cs typeface="Arial" panose="020B0604020202020204" pitchFamily="34" charset="0"/>
+              </a:rPr>
+              <a:t>obtener</a:t>
+            </a:r>
+            <a:r>
+              <a:rPr lang="en-US" sz="1200" dirty="0">
+                <a:latin typeface="Arial" panose="020B0604020202020204" pitchFamily="34" charset="0"/>
+                <a:cs typeface="Arial" panose="020B0604020202020204" pitchFamily="34" charset="0"/>
+              </a:rPr>
+              <a:t> un ER </a:t>
+            </a:r>
+            <a:r>
+              <a:rPr lang="en-US" sz="1200" dirty="0" err="1">
+                <a:latin typeface="Arial" panose="020B0604020202020204" pitchFamily="34" charset="0"/>
+                <a:cs typeface="Arial" panose="020B0604020202020204" pitchFamily="34" charset="0"/>
+              </a:rPr>
+              <a:t>elevado</a:t>
+            </a:r>
+            <a:r>
+              <a:rPr lang="en-US" sz="1200" dirty="0">
+                <a:latin typeface="Arial" panose="020B0604020202020204" pitchFamily="34" charset="0"/>
+                <a:cs typeface="Arial" panose="020B0604020202020204" pitchFamily="34" charset="0"/>
+              </a:rPr>
+              <a:t> (de </a:t>
+            </a:r>
+            <a:r>
+              <a:rPr lang="en-US" sz="1200" dirty="0" err="1">
+                <a:latin typeface="Arial" panose="020B0604020202020204" pitchFamily="34" charset="0"/>
+                <a:cs typeface="Arial" panose="020B0604020202020204" pitchFamily="34" charset="0"/>
+              </a:rPr>
+              <a:t>unos</a:t>
+            </a:r>
+            <a:r>
+              <a:rPr lang="en-US" sz="1200" dirty="0">
+                <a:latin typeface="Arial" panose="020B0604020202020204" pitchFamily="34" charset="0"/>
+                <a:cs typeface="Arial" panose="020B0604020202020204" pitchFamily="34" charset="0"/>
+              </a:rPr>
+              <a:t> 80db) </a:t>
+            </a:r>
+            <a:r>
+              <a:rPr lang="en-US" sz="1200" dirty="0" err="1">
+                <a:latin typeface="Arial" panose="020B0604020202020204" pitchFamily="34" charset="0"/>
+                <a:cs typeface="Arial" panose="020B0604020202020204" pitchFamily="34" charset="0"/>
+              </a:rPr>
+              <a:t>habría</a:t>
+            </a:r>
+            <a:r>
+              <a:rPr lang="en-US" sz="1200" dirty="0">
+                <a:latin typeface="Arial" panose="020B0604020202020204" pitchFamily="34" charset="0"/>
+                <a:cs typeface="Arial" panose="020B0604020202020204" pitchFamily="34" charset="0"/>
+              </a:rPr>
+              <a:t> </a:t>
+            </a:r>
+            <a:r>
+              <a:rPr lang="en-US" sz="1200" dirty="0" err="1">
+                <a:latin typeface="Arial" panose="020B0604020202020204" pitchFamily="34" charset="0"/>
+                <a:cs typeface="Arial" panose="020B0604020202020204" pitchFamily="34" charset="0"/>
+              </a:rPr>
+              <a:t>que</a:t>
+            </a:r>
+            <a:r>
+              <a:rPr lang="en-US" sz="1200" dirty="0">
+                <a:latin typeface="Arial" panose="020B0604020202020204" pitchFamily="34" charset="0"/>
+                <a:cs typeface="Arial" panose="020B0604020202020204" pitchFamily="34" charset="0"/>
+              </a:rPr>
+              <a:t> </a:t>
+            </a:r>
+            <a:r>
+              <a:rPr lang="en-US" sz="1200" dirty="0" err="1">
+                <a:latin typeface="Arial" panose="020B0604020202020204" pitchFamily="34" charset="0"/>
+                <a:cs typeface="Arial" panose="020B0604020202020204" pitchFamily="34" charset="0"/>
+              </a:rPr>
+              <a:t>poner</a:t>
+            </a:r>
+            <a:r>
+              <a:rPr lang="en-US" sz="1200" dirty="0">
+                <a:latin typeface="Arial" panose="020B0604020202020204" pitchFamily="34" charset="0"/>
+                <a:cs typeface="Arial" panose="020B0604020202020204" pitchFamily="34" charset="0"/>
+              </a:rPr>
+              <a:t> Ka = 0.994. </a:t>
+            </a:r>
+            <a:r>
+              <a:rPr lang="en-US" sz="1200" dirty="0" err="1">
+                <a:latin typeface="Arial" panose="020B0604020202020204" pitchFamily="34" charset="0"/>
+                <a:cs typeface="Arial" panose="020B0604020202020204" pitchFamily="34" charset="0"/>
+              </a:rPr>
+              <a:t>Aunque</a:t>
+            </a:r>
+            <a:r>
+              <a:rPr lang="en-US" sz="1200" dirty="0">
+                <a:latin typeface="Arial" panose="020B0604020202020204" pitchFamily="34" charset="0"/>
+                <a:cs typeface="Arial" panose="020B0604020202020204" pitchFamily="34" charset="0"/>
+              </a:rPr>
+              <a:t> </a:t>
+            </a:r>
+            <a:r>
+              <a:rPr lang="en-US" sz="1200" dirty="0" err="1">
+                <a:latin typeface="Arial" panose="020B0604020202020204" pitchFamily="34" charset="0"/>
+                <a:cs typeface="Arial" panose="020B0604020202020204" pitchFamily="34" charset="0"/>
+              </a:rPr>
+              <a:t>los</a:t>
+            </a:r>
+            <a:r>
+              <a:rPr lang="en-US" sz="1200" dirty="0">
+                <a:latin typeface="Arial" panose="020B0604020202020204" pitchFamily="34" charset="0"/>
+                <a:cs typeface="Arial" panose="020B0604020202020204" pitchFamily="34" charset="0"/>
+              </a:rPr>
+              <a:t> </a:t>
+            </a:r>
+            <a:r>
+              <a:rPr lang="en-US" sz="1200" dirty="0" err="1">
+                <a:latin typeface="Arial" panose="020B0604020202020204" pitchFamily="34" charset="0"/>
+                <a:cs typeface="Arial" panose="020B0604020202020204" pitchFamily="34" charset="0"/>
+              </a:rPr>
+              <a:t>niveles</a:t>
+            </a:r>
+            <a:r>
+              <a:rPr lang="en-US" sz="1200" dirty="0">
+                <a:latin typeface="Arial" panose="020B0604020202020204" pitchFamily="34" charset="0"/>
+                <a:cs typeface="Arial" panose="020B0604020202020204" pitchFamily="34" charset="0"/>
+              </a:rPr>
+              <a:t> de </a:t>
+            </a:r>
+            <a:r>
+              <a:rPr lang="en-US" sz="1200" dirty="0" err="1">
+                <a:latin typeface="Arial" panose="020B0604020202020204" pitchFamily="34" charset="0"/>
+                <a:cs typeface="Arial" panose="020B0604020202020204" pitchFamily="34" charset="0"/>
+              </a:rPr>
+              <a:t>potencia</a:t>
+            </a:r>
+            <a:r>
+              <a:rPr lang="en-US" sz="1200" dirty="0">
+                <a:latin typeface="Arial" panose="020B0604020202020204" pitchFamily="34" charset="0"/>
+                <a:cs typeface="Arial" panose="020B0604020202020204" pitchFamily="34" charset="0"/>
+              </a:rPr>
+              <a:t> son </a:t>
+            </a:r>
+            <a:r>
+              <a:rPr lang="en-US" sz="1200" dirty="0" err="1">
+                <a:latin typeface="Arial" panose="020B0604020202020204" pitchFamily="34" charset="0"/>
+                <a:cs typeface="Arial" panose="020B0604020202020204" pitchFamily="34" charset="0"/>
+              </a:rPr>
+              <a:t>muy</a:t>
+            </a:r>
+            <a:r>
+              <a:rPr lang="en-US" sz="1200" dirty="0">
+                <a:latin typeface="Arial" panose="020B0604020202020204" pitchFamily="34" charset="0"/>
+                <a:cs typeface="Arial" panose="020B0604020202020204" pitchFamily="34" charset="0"/>
+              </a:rPr>
+              <a:t> </a:t>
+            </a:r>
+            <a:r>
+              <a:rPr lang="en-US" sz="1200" dirty="0" err="1">
+                <a:latin typeface="Arial" panose="020B0604020202020204" pitchFamily="34" charset="0"/>
+                <a:cs typeface="Arial" panose="020B0604020202020204" pitchFamily="34" charset="0"/>
+              </a:rPr>
+              <a:t>bajos</a:t>
+            </a:r>
+            <a:r>
+              <a:rPr lang="en-US" sz="1200" dirty="0">
+                <a:latin typeface="Arial" panose="020B0604020202020204" pitchFamily="34" charset="0"/>
+                <a:cs typeface="Arial" panose="020B0604020202020204" pitchFamily="34" charset="0"/>
+              </a:rPr>
+              <a:t>, </a:t>
+            </a:r>
+            <a:r>
+              <a:rPr lang="en-US" sz="1200" dirty="0" err="1">
+                <a:latin typeface="Arial" panose="020B0604020202020204" pitchFamily="34" charset="0"/>
+                <a:cs typeface="Arial" panose="020B0604020202020204" pitchFamily="34" charset="0"/>
+              </a:rPr>
+              <a:t>pero</a:t>
+            </a:r>
+            <a:r>
+              <a:rPr lang="en-US" sz="1200" dirty="0">
+                <a:latin typeface="Arial" panose="020B0604020202020204" pitchFamily="34" charset="0"/>
+                <a:cs typeface="Arial" panose="020B0604020202020204" pitchFamily="34" charset="0"/>
+              </a:rPr>
+              <a:t> se </a:t>
+            </a:r>
+            <a:r>
+              <a:rPr lang="en-US" sz="1200" dirty="0" err="1">
+                <a:latin typeface="Arial" panose="020B0604020202020204" pitchFamily="34" charset="0"/>
+                <a:cs typeface="Arial" panose="020B0604020202020204" pitchFamily="34" charset="0"/>
+              </a:rPr>
+              <a:t>consigue</a:t>
+            </a:r>
+            <a:r>
+              <a:rPr lang="en-US" sz="1200" dirty="0">
+                <a:latin typeface="Arial" panose="020B0604020202020204" pitchFamily="34" charset="0"/>
+                <a:cs typeface="Arial" panose="020B0604020202020204" pitchFamily="34" charset="0"/>
+              </a:rPr>
+              <a:t> balance de </a:t>
+            </a:r>
+            <a:r>
+              <a:rPr lang="en-US" sz="1200" dirty="0" err="1">
+                <a:latin typeface="Arial" panose="020B0604020202020204" pitchFamily="34" charset="0"/>
+                <a:cs typeface="Arial" panose="020B0604020202020204" pitchFamily="34" charset="0"/>
+              </a:rPr>
+              <a:t>potencias</a:t>
+            </a:r>
+            <a:r>
+              <a:rPr lang="en-US" sz="1200" dirty="0">
+                <a:latin typeface="Arial" panose="020B0604020202020204" pitchFamily="34" charset="0"/>
+                <a:cs typeface="Arial" panose="020B0604020202020204" pitchFamily="34" charset="0"/>
+              </a:rPr>
+              <a:t> y, </a:t>
+            </a:r>
+            <a:r>
+              <a:rPr lang="en-US" sz="1200" dirty="0" err="1">
+                <a:latin typeface="Arial" panose="020B0604020202020204" pitchFamily="34" charset="0"/>
+                <a:cs typeface="Arial" panose="020B0604020202020204" pitchFamily="34" charset="0"/>
+              </a:rPr>
+              <a:t>por</a:t>
+            </a:r>
+            <a:r>
+              <a:rPr lang="en-US" sz="1200" dirty="0">
+                <a:latin typeface="Arial" panose="020B0604020202020204" pitchFamily="34" charset="0"/>
+                <a:cs typeface="Arial" panose="020B0604020202020204" pitchFamily="34" charset="0"/>
+              </a:rPr>
+              <a:t> tanto, </a:t>
+            </a:r>
+            <a:r>
+              <a:rPr lang="en-US" sz="1200" dirty="0" err="1">
+                <a:latin typeface="Arial" panose="020B0604020202020204" pitchFamily="34" charset="0"/>
+                <a:cs typeface="Arial" panose="020B0604020202020204" pitchFamily="34" charset="0"/>
+              </a:rPr>
+              <a:t>interferencia</a:t>
+            </a:r>
+            <a:r>
+              <a:rPr lang="en-US" sz="1200" dirty="0">
+                <a:latin typeface="Arial" panose="020B0604020202020204" pitchFamily="34" charset="0"/>
+                <a:cs typeface="Arial" panose="020B0604020202020204" pitchFamily="34" charset="0"/>
+              </a:rPr>
+              <a:t> </a:t>
+            </a:r>
+            <a:r>
+              <a:rPr lang="en-US" sz="1200" dirty="0" err="1">
+                <a:latin typeface="Arial" panose="020B0604020202020204" pitchFamily="34" charset="0"/>
+                <a:cs typeface="Arial" panose="020B0604020202020204" pitchFamily="34" charset="0"/>
+              </a:rPr>
+              <a:t>destructiva</a:t>
+            </a:r>
+            <a:r>
+              <a:rPr lang="en-US" sz="1200" dirty="0">
+                <a:latin typeface="Arial" panose="020B0604020202020204" pitchFamily="34" charset="0"/>
+                <a:cs typeface="Arial" panose="020B0604020202020204" pitchFamily="34" charset="0"/>
+              </a:rPr>
+              <a:t> y </a:t>
+            </a:r>
+            <a:r>
+              <a:rPr lang="en-US" sz="1200" dirty="0" err="1">
+                <a:latin typeface="Arial" panose="020B0604020202020204" pitchFamily="34" charset="0"/>
+                <a:cs typeface="Arial" panose="020B0604020202020204" pitchFamily="34" charset="0"/>
+              </a:rPr>
+              <a:t>constructiva</a:t>
+            </a:r>
+            <a:r>
+              <a:rPr lang="en-US" sz="1200" dirty="0">
+                <a:latin typeface="Arial" panose="020B0604020202020204" pitchFamily="34" charset="0"/>
+                <a:cs typeface="Arial" panose="020B0604020202020204" pitchFamily="34" charset="0"/>
+              </a:rPr>
+              <a:t>.</a:t>
+            </a:r>
+          </a:p>
+        </p:txBody>
+      </p:sp>
+      <p:sp>
+        <p:nvSpPr>
           <p:cNvPr id="4" name="Rectángulo 3">
             <a:extLst>
               <a:ext uri="{FF2B5EF4-FFF2-40B4-BE49-F238E27FC236}">
-                <a16:creationId xmlns:a16="http://schemas.microsoft.com/office/drawing/2014/main" id="{8E8F9455-14C3-BEC9-87A1-7D23F3B29FA4}"/>
+                <a16:creationId xmlns:a16="http://schemas.microsoft.com/office/drawing/2014/main" id="{A3D0DCC6-D308-6F85-03EB-1B617CE89898}"/>
               </a:ext>
             </a:extLst>
           </p:cNvPr>
@@ -12014,7 +12306,7 @@
           <p:cNvPr id="7" name="Rectángulo 6">
             <a:extLst>
               <a:ext uri="{FF2B5EF4-FFF2-40B4-BE49-F238E27FC236}">
-                <a16:creationId xmlns:a16="http://schemas.microsoft.com/office/drawing/2014/main" id="{6DF9E299-A96A-1AF0-9C8D-334C17486454}"/>
+                <a16:creationId xmlns:a16="http://schemas.microsoft.com/office/drawing/2014/main" id="{5C79C3D3-A414-D20A-CFF3-6D53EFB8D7B8}"/>
               </a:ext>
             </a:extLst>
           </p:cNvPr>
@@ -12344,7 +12636,7 @@
           <p:cNvPr id="9" name="CuadroTexto 8">
             <a:extLst>
               <a:ext uri="{FF2B5EF4-FFF2-40B4-BE49-F238E27FC236}">
-                <a16:creationId xmlns:a16="http://schemas.microsoft.com/office/drawing/2014/main" id="{35C7BC8F-DE36-1070-0F6C-B9DC6313B828}"/>
+                <a16:creationId xmlns:a16="http://schemas.microsoft.com/office/drawing/2014/main" id="{0B7602C4-F055-A15E-D163-562F4CEB3374}"/>
               </a:ext>
             </a:extLst>
           </p:cNvPr>
@@ -12393,10 +12685,10 @@
       </p:sp>
       <p:pic>
         <p:nvPicPr>
-          <p:cNvPr id="8" name="Imagen 7">
+          <p:cNvPr id="14" name="Imagen 13">
             <a:extLst>
               <a:ext uri="{FF2B5EF4-FFF2-40B4-BE49-F238E27FC236}">
-                <a16:creationId xmlns:a16="http://schemas.microsoft.com/office/drawing/2014/main" id="{968DD534-63B3-4107-3E0E-37CE614589B8}"/>
+                <a16:creationId xmlns:a16="http://schemas.microsoft.com/office/drawing/2014/main" id="{751D3DA2-B3D0-7771-39BF-E296A2E6061C}"/>
               </a:ext>
             </a:extLst>
           </p:cNvPr>
@@ -12413,8 +12705,8 @@
         </p:blipFill>
         <p:spPr>
           <a:xfrm>
-            <a:off x="685800" y="1550963"/>
-            <a:ext cx="5340057" cy="2992094"/>
+            <a:off x="609441" y="1474211"/>
+            <a:ext cx="5577999" cy="3004608"/>
           </a:xfrm>
           <a:prstGeom prst="rect">
             <a:avLst/>
@@ -12424,7 +12716,7 @@
     </p:spTree>
     <p:extLst>
       <p:ext uri="{BB962C8B-B14F-4D97-AF65-F5344CB8AC3E}">
-        <p14:creationId xmlns:p14="http://schemas.microsoft.com/office/powerpoint/2010/main" val="1635538090"/>
+        <p14:creationId xmlns:p14="http://schemas.microsoft.com/office/powerpoint/2010/main" val="2258742307"/>
       </p:ext>
     </p:extLst>
   </p:cSld>
